--- a/public/lessons/year-6-maths/spring/week-11/compare-fractions/teaching-powerpoint-v1.pptx
+++ b/public/lessons/year-6-maths/spring/week-11/compare-fractions/teaching-powerpoint-v1.pptx
@@ -2,24 +2,24 @@
 <file path=ppt/presentation.xml><?xml version="1.0" encoding="utf-8"?>
 <p:presentation xmlns:p="http://schemas.openxmlformats.org/presentationml/2006/main">
   <p:sldMasterIdLst>
-    <p:sldMasterId xmlns:r="http://schemas.openxmlformats.org/officeDocument/2006/relationships" id="2147483648" r:id="R660eae7d8bd94377"/>
+    <p:sldMasterId xmlns:r="http://schemas.openxmlformats.org/officeDocument/2006/relationships" id="2147483648" r:id="R3ccba02b3c3148ba"/>
   </p:sldMasterIdLst>
   <p:notesMasterIdLst>
-    <p:notesMasterId xmlns:r="http://schemas.openxmlformats.org/officeDocument/2006/relationships" r:id="R6c52982f94ab45f9"/>
+    <p:notesMasterId xmlns:r="http://schemas.openxmlformats.org/officeDocument/2006/relationships" r:id="R24c3dda0e3314508"/>
   </p:notesMasterIdLst>
   <p:sldIdLst>
-    <p:sldId xmlns:r="http://schemas.openxmlformats.org/officeDocument/2006/relationships" id="256" r:id="R7b094e04ef824fd2"/>
-    <p:sldId xmlns:r="http://schemas.openxmlformats.org/officeDocument/2006/relationships" id="257" r:id="R130338dc169c4caf"/>
-    <p:sldId xmlns:r="http://schemas.openxmlformats.org/officeDocument/2006/relationships" id="258" r:id="Rfc1b0696000e4ccb"/>
-    <p:sldId xmlns:r="http://schemas.openxmlformats.org/officeDocument/2006/relationships" id="259" r:id="Ra3053fa1577549d4"/>
-    <p:sldId xmlns:r="http://schemas.openxmlformats.org/officeDocument/2006/relationships" id="260" r:id="R515b16e984994d1a"/>
-    <p:sldId xmlns:r="http://schemas.openxmlformats.org/officeDocument/2006/relationships" id="261" r:id="Re63bc7e4d3fd433f"/>
-    <p:sldId xmlns:r="http://schemas.openxmlformats.org/officeDocument/2006/relationships" id="262" r:id="R902d93d6211f4292"/>
-    <p:sldId xmlns:r="http://schemas.openxmlformats.org/officeDocument/2006/relationships" id="263" r:id="R2db77528b3ad4a5a"/>
-    <p:sldId xmlns:r="http://schemas.openxmlformats.org/officeDocument/2006/relationships" id="264" r:id="R7cf3ba3bf6c845aa"/>
-    <p:sldId xmlns:r="http://schemas.openxmlformats.org/officeDocument/2006/relationships" id="265" r:id="R534baa606ea54324"/>
-    <p:sldId xmlns:r="http://schemas.openxmlformats.org/officeDocument/2006/relationships" id="266" r:id="R685ed90b2ed3409f"/>
-    <p:sldId xmlns:r="http://schemas.openxmlformats.org/officeDocument/2006/relationships" id="267" r:id="Rd36f5c19415e4cc6"/>
+    <p:sldId xmlns:r="http://schemas.openxmlformats.org/officeDocument/2006/relationships" id="256" r:id="Re0f4f8e74c334e46"/>
+    <p:sldId xmlns:r="http://schemas.openxmlformats.org/officeDocument/2006/relationships" id="257" r:id="R2920094dad104028"/>
+    <p:sldId xmlns:r="http://schemas.openxmlformats.org/officeDocument/2006/relationships" id="258" r:id="R6e4647b6da304d3d"/>
+    <p:sldId xmlns:r="http://schemas.openxmlformats.org/officeDocument/2006/relationships" id="259" r:id="R9fd3c3d7cc084ff5"/>
+    <p:sldId xmlns:r="http://schemas.openxmlformats.org/officeDocument/2006/relationships" id="260" r:id="R018d8934146042ef"/>
+    <p:sldId xmlns:r="http://schemas.openxmlformats.org/officeDocument/2006/relationships" id="261" r:id="Ra6e50f721c0640dd"/>
+    <p:sldId xmlns:r="http://schemas.openxmlformats.org/officeDocument/2006/relationships" id="262" r:id="Ra202f460a60048d4"/>
+    <p:sldId xmlns:r="http://schemas.openxmlformats.org/officeDocument/2006/relationships" id="263" r:id="Re3a5177055044bfd"/>
+    <p:sldId xmlns:r="http://schemas.openxmlformats.org/officeDocument/2006/relationships" id="264" r:id="Rd5a3f922a9af41b1"/>
+    <p:sldId xmlns:r="http://schemas.openxmlformats.org/officeDocument/2006/relationships" id="265" r:id="R78f59ac56dca4745"/>
+    <p:sldId xmlns:r="http://schemas.openxmlformats.org/officeDocument/2006/relationships" id="266" r:id="R202f60e80811475b"/>
+    <p:sldId xmlns:r="http://schemas.openxmlformats.org/officeDocument/2006/relationships" id="267" r:id="Ra7fbab296c7c43e6"/>
   </p:sldIdLst>
   <p:sldSz cx="12192000" cy="6858000"/>
   <p:notesSz cx="6858000" cy="9144000"/>
@@ -873,7 +873,7 @@
           <a:lstStyle xmlns:a="http://schemas.openxmlformats.org/drawingml/2006/main"/>
           <a:p xmlns:a="http://schemas.openxmlformats.org/drawingml/2006/main">
             <a:r>
-              <a:t>I do. Reveal the question, setup and each calculation stage one click at a time. Pupils watch before copying. Model answer: 5/8 because 7/12 = 14/24 and 5/8 = 15/24.</a:t>
+              <a:t>I do. Reveal the question, then reveal each mathematical change one click at a time. Point to the numbers and operation that changed before moving to the next line. Final answer: 5/8 because 7/12 = 14/24 and 5/8 = 15/24.</a:t>
             </a:r>
           </a:p>
         </p:txBody>
@@ -1291,7 +1291,7 @@
   </p:cSld>
   <p:clrMap bg1="lt1" tx1="dk1" bg2="lt2" tx2="dk2" accent1="accent1" accent2="accent2" accent3="accent3" accent4="accent4" accent5="accent5" accent6="accent6" hlink="hlink" folHlink="folHlink"/>
   <p:sldLayoutIdLst>
-    <p:sldLayoutId xmlns:r="http://schemas.openxmlformats.org/officeDocument/2006/relationships" id="2147483649" r:id="R3a99996ccf6f49a4"/>
+    <p:sldLayoutId xmlns:r="http://schemas.openxmlformats.org/officeDocument/2006/relationships" id="2147483649" r:id="R70e597d32f23416c"/>
   </p:sldLayoutIdLst>
   <p:txStyles>
     <p:titleStyle>
@@ -1842,7 +1842,7 @@
           <p:cNvPr id="12" name="">
             <a:extLst xmlns:a="http://schemas.openxmlformats.org/drawingml/2006/main">
               <a:ext uri="{FF2B5EF4-FFF2-40B4-BE49-F238E27FC236}">
-                <a16:creationId xmlns:a16="http://schemas.microsoft.com/office/drawing/2014/main" id="{64A5FD40-A2A8-4B4A-BF74-8C802C69B13D}"/>
+                <a16:creationId xmlns:a16="http://schemas.microsoft.com/office/drawing/2014/main" id="{C1B26F03-12CC-44AF-BF48-484C3F2A4441}"/>
               </a:ext>
             </a:extLst>
           </p:cNvPr>
@@ -1874,7 +1874,7 @@
           <p:cNvPr id="2" name="">
             <a:extLst xmlns:a="http://schemas.openxmlformats.org/drawingml/2006/main">
               <a:ext uri="{FF2B5EF4-FFF2-40B4-BE49-F238E27FC236}">
-                <a16:creationId xmlns:a16="http://schemas.microsoft.com/office/drawing/2014/main" id="{9FBED022-1875-42D1-8166-94DA13E48102}"/>
+                <a16:creationId xmlns:a16="http://schemas.microsoft.com/office/drawing/2014/main" id="{85B652FE-5715-48EC-B5E3-500839A49EB5}"/>
               </a:ext>
             </a:extLst>
           </p:cNvPr>
@@ -1931,7 +1931,7 @@
           <p:cNvPr id="3" name="">
             <a:extLst xmlns:a="http://schemas.openxmlformats.org/drawingml/2006/main">
               <a:ext uri="{FF2B5EF4-FFF2-40B4-BE49-F238E27FC236}">
-                <a16:creationId xmlns:a16="http://schemas.microsoft.com/office/drawing/2014/main" id="{B1633601-7B20-4C92-9044-177076EE404E}"/>
+                <a16:creationId xmlns:a16="http://schemas.microsoft.com/office/drawing/2014/main" id="{8EBF547C-30F5-4739-AF77-9BDA88733923}"/>
               </a:ext>
             </a:extLst>
           </p:cNvPr>
@@ -1965,7 +1965,7 @@
           <p:cNvPr id="4" name="">
             <a:extLst xmlns:a="http://schemas.openxmlformats.org/drawingml/2006/main">
               <a:ext uri="{FF2B5EF4-FFF2-40B4-BE49-F238E27FC236}">
-                <a16:creationId xmlns:a16="http://schemas.microsoft.com/office/drawing/2014/main" id="{5AAEBDC0-F0D3-4716-A90E-ED162D5B35C9}"/>
+                <a16:creationId xmlns:a16="http://schemas.microsoft.com/office/drawing/2014/main" id="{C44A1813-CB32-45B5-8DA4-6C786C49C65C}"/>
               </a:ext>
             </a:extLst>
           </p:cNvPr>
@@ -2022,7 +2022,7 @@
           <p:cNvPr id="5" name="">
             <a:extLst xmlns:a="http://schemas.openxmlformats.org/drawingml/2006/main">
               <a:ext uri="{FF2B5EF4-FFF2-40B4-BE49-F238E27FC236}">
-                <a16:creationId xmlns:a16="http://schemas.microsoft.com/office/drawing/2014/main" id="{D6777FEE-DD4D-48D8-A872-AB4509AB414C}"/>
+                <a16:creationId xmlns:a16="http://schemas.microsoft.com/office/drawing/2014/main" id="{2C33EAB8-9973-4D4A-9F69-BDAC84EBA6A5}"/>
               </a:ext>
             </a:extLst>
           </p:cNvPr>
@@ -2079,7 +2079,7 @@
           <p:cNvPr id="6" name="">
             <a:extLst xmlns:a="http://schemas.openxmlformats.org/drawingml/2006/main">
               <a:ext uri="{FF2B5EF4-FFF2-40B4-BE49-F238E27FC236}">
-                <a16:creationId xmlns:a16="http://schemas.microsoft.com/office/drawing/2014/main" id="{9F366933-7D6F-4E96-BB5A-B142DE54D008}"/>
+                <a16:creationId xmlns:a16="http://schemas.microsoft.com/office/drawing/2014/main" id="{BB79FDEB-714C-4C14-B848-BDEB325DFE72}"/>
               </a:ext>
             </a:extLst>
           </p:cNvPr>
@@ -2113,7 +2113,7 @@
           <p:cNvPr id="7" name="">
             <a:extLst xmlns:a="http://schemas.openxmlformats.org/drawingml/2006/main">
               <a:ext uri="{FF2B5EF4-FFF2-40B4-BE49-F238E27FC236}">
-                <a16:creationId xmlns:a16="http://schemas.microsoft.com/office/drawing/2014/main" id="{2EC56506-D7D4-43B3-AC41-9EE776669CC4}"/>
+                <a16:creationId xmlns:a16="http://schemas.microsoft.com/office/drawing/2014/main" id="{C9D65840-181C-4D9C-AC94-DCD005F753F6}"/>
               </a:ext>
             </a:extLst>
           </p:cNvPr>
@@ -2170,7 +2170,7 @@
           <p:cNvPr id="8" name="">
             <a:extLst xmlns:a="http://schemas.openxmlformats.org/drawingml/2006/main">
               <a:ext uri="{FF2B5EF4-FFF2-40B4-BE49-F238E27FC236}">
-                <a16:creationId xmlns:a16="http://schemas.microsoft.com/office/drawing/2014/main" id="{C4BE8FAA-5976-47BC-B94E-AC62EFF284B2}"/>
+                <a16:creationId xmlns:a16="http://schemas.microsoft.com/office/drawing/2014/main" id="{C0860615-067B-4B5E-8FC9-CC405DBD878B}"/>
               </a:ext>
             </a:extLst>
           </p:cNvPr>
@@ -2227,7 +2227,7 @@
           <p:cNvPr id="9" name="">
             <a:extLst xmlns:a="http://schemas.openxmlformats.org/drawingml/2006/main">
               <a:ext uri="{FF2B5EF4-FFF2-40B4-BE49-F238E27FC236}">
-                <a16:creationId xmlns:a16="http://schemas.microsoft.com/office/drawing/2014/main" id="{D9C61007-D804-48EF-AB12-2429B230B1E4}"/>
+                <a16:creationId xmlns:a16="http://schemas.microsoft.com/office/drawing/2014/main" id="{221A448F-1B8F-4367-B926-22DDE1F6C331}"/>
               </a:ext>
             </a:extLst>
           </p:cNvPr>
@@ -2284,7 +2284,7 @@
           <p:cNvPr id="10" name="">
             <a:extLst xmlns:a="http://schemas.openxmlformats.org/drawingml/2006/main">
               <a:ext uri="{FF2B5EF4-FFF2-40B4-BE49-F238E27FC236}">
-                <a16:creationId xmlns:a16="http://schemas.microsoft.com/office/drawing/2014/main" id="{266736C5-DEC0-4B0C-9443-53AF5B9A9B02}"/>
+                <a16:creationId xmlns:a16="http://schemas.microsoft.com/office/drawing/2014/main" id="{EED3D197-FB73-4721-9D78-E835B1775BCC}"/>
               </a:ext>
             </a:extLst>
           </p:cNvPr>
@@ -2341,7 +2341,7 @@
           <p:cNvPr id="11" name="">
             <a:extLst xmlns:a="http://schemas.openxmlformats.org/drawingml/2006/main">
               <a:ext uri="{FF2B5EF4-FFF2-40B4-BE49-F238E27FC236}">
-                <a16:creationId xmlns:a16="http://schemas.microsoft.com/office/drawing/2014/main" id="{7B1A365B-5E49-4FEC-B497-48672BFC51E3}"/>
+                <a16:creationId xmlns:a16="http://schemas.microsoft.com/office/drawing/2014/main" id="{CF76514E-D5A0-4557-96E2-66CDB9DE5019}"/>
               </a:ext>
             </a:extLst>
           </p:cNvPr>
@@ -2396,7 +2396,7 @@
     </p:spTree>
     <p:extLst>
       <p:ext uri="{BB962C8B-B14F-4D97-AF65-F5344CB8AC3E}">
-        <p14:creationId xmlns:p14="http://schemas.microsoft.com/office/powerpoint/2010/main" val="688106461"/>
+        <p14:creationId xmlns:p14="http://schemas.microsoft.com/office/powerpoint/2010/main" val="624794411"/>
       </p:ext>
     </p:extLst>
   </p:cSld>
@@ -2427,7 +2427,7 @@
           <p:cNvPr id="14" name="">
             <a:extLst xmlns:a="http://schemas.openxmlformats.org/drawingml/2006/main">
               <a:ext uri="{FF2B5EF4-FFF2-40B4-BE49-F238E27FC236}">
-                <a16:creationId xmlns:a16="http://schemas.microsoft.com/office/drawing/2014/main" id="{ADE03A70-A608-46EC-A2E3-D982D6E8B53E}"/>
+                <a16:creationId xmlns:a16="http://schemas.microsoft.com/office/drawing/2014/main" id="{CF5509A7-0820-44E3-8A6A-7ED23A0FB147}"/>
               </a:ext>
             </a:extLst>
           </p:cNvPr>
@@ -2459,7 +2459,7 @@
           <p:cNvPr id="2" name="">
             <a:extLst xmlns:a="http://schemas.openxmlformats.org/drawingml/2006/main">
               <a:ext uri="{FF2B5EF4-FFF2-40B4-BE49-F238E27FC236}">
-                <a16:creationId xmlns:a16="http://schemas.microsoft.com/office/drawing/2014/main" id="{7CE5AC54-1CB1-49FE-B7A5-056A095E8D52}"/>
+                <a16:creationId xmlns:a16="http://schemas.microsoft.com/office/drawing/2014/main" id="{00A06F47-47AE-4384-8C76-923374C8A5AB}"/>
               </a:ext>
             </a:extLst>
           </p:cNvPr>
@@ -2516,7 +2516,7 @@
           <p:cNvPr id="3" name="">
             <a:extLst xmlns:a="http://schemas.openxmlformats.org/drawingml/2006/main">
               <a:ext uri="{FF2B5EF4-FFF2-40B4-BE49-F238E27FC236}">
-                <a16:creationId xmlns:a16="http://schemas.microsoft.com/office/drawing/2014/main" id="{39E2236A-0245-4B6E-9C09-976CA4413098}"/>
+                <a16:creationId xmlns:a16="http://schemas.microsoft.com/office/drawing/2014/main" id="{52A68AC1-4352-4014-A0E2-357731251370}"/>
               </a:ext>
             </a:extLst>
           </p:cNvPr>
@@ -2548,7 +2548,7 @@
           <p:cNvPr id="4" name="">
             <a:extLst xmlns:a="http://schemas.openxmlformats.org/drawingml/2006/main">
               <a:ext uri="{FF2B5EF4-FFF2-40B4-BE49-F238E27FC236}">
-                <a16:creationId xmlns:a16="http://schemas.microsoft.com/office/drawing/2014/main" id="{091023EF-CCB0-4E95-8ED1-476A32DFDC33}"/>
+                <a16:creationId xmlns:a16="http://schemas.microsoft.com/office/drawing/2014/main" id="{A82D27D2-B3DE-49DE-99E4-1FA8840D4CB4}"/>
               </a:ext>
             </a:extLst>
           </p:cNvPr>
@@ -2605,7 +2605,7 @@
           <p:cNvPr id="5" name="">
             <a:extLst xmlns:a="http://schemas.openxmlformats.org/drawingml/2006/main">
               <a:ext uri="{FF2B5EF4-FFF2-40B4-BE49-F238E27FC236}">
-                <a16:creationId xmlns:a16="http://schemas.microsoft.com/office/drawing/2014/main" id="{D266B050-CDA0-4A2F-BBEB-41520733D04C}"/>
+                <a16:creationId xmlns:a16="http://schemas.microsoft.com/office/drawing/2014/main" id="{CD96B6D4-1F39-4270-B582-812044B335E5}"/>
               </a:ext>
             </a:extLst>
           </p:cNvPr>
@@ -2662,7 +2662,7 @@
           <p:cNvPr id="6" name="">
             <a:extLst xmlns:a="http://schemas.openxmlformats.org/drawingml/2006/main">
               <a:ext uri="{FF2B5EF4-FFF2-40B4-BE49-F238E27FC236}">
-                <a16:creationId xmlns:a16="http://schemas.microsoft.com/office/drawing/2014/main" id="{FC1BE413-14F6-42DE-9BDF-597149BA4FCD}"/>
+                <a16:creationId xmlns:a16="http://schemas.microsoft.com/office/drawing/2014/main" id="{B2FAECE7-65D6-423A-898C-321E75947714}"/>
               </a:ext>
             </a:extLst>
           </p:cNvPr>
@@ -2719,7 +2719,7 @@
           <p:cNvPr id="7" name="">
             <a:extLst xmlns:a="http://schemas.openxmlformats.org/drawingml/2006/main">
               <a:ext uri="{FF2B5EF4-FFF2-40B4-BE49-F238E27FC236}">
-                <a16:creationId xmlns:a16="http://schemas.microsoft.com/office/drawing/2014/main" id="{5F5A90D4-9DE0-431F-A1E8-81BEEAC63A42}"/>
+                <a16:creationId xmlns:a16="http://schemas.microsoft.com/office/drawing/2014/main" id="{1F4DC466-235D-455E-95BC-38320DB7A186}"/>
               </a:ext>
             </a:extLst>
           </p:cNvPr>
@@ -2751,7 +2751,7 @@
           <p:cNvPr id="8" name="">
             <a:extLst xmlns:a="http://schemas.openxmlformats.org/drawingml/2006/main">
               <a:ext uri="{FF2B5EF4-FFF2-40B4-BE49-F238E27FC236}">
-                <a16:creationId xmlns:a16="http://schemas.microsoft.com/office/drawing/2014/main" id="{D453625B-EEED-4697-892E-9F4FB4E8A720}"/>
+                <a16:creationId xmlns:a16="http://schemas.microsoft.com/office/drawing/2014/main" id="{50AEF709-F57A-4190-A622-3ECCEF58D5F1}"/>
               </a:ext>
             </a:extLst>
           </p:cNvPr>
@@ -2808,7 +2808,7 @@
           <p:cNvPr id="9" name="">
             <a:extLst xmlns:a="http://schemas.openxmlformats.org/drawingml/2006/main">
               <a:ext uri="{FF2B5EF4-FFF2-40B4-BE49-F238E27FC236}">
-                <a16:creationId xmlns:a16="http://schemas.microsoft.com/office/drawing/2014/main" id="{E05F06AC-1C77-43F6-BF93-6FDB88B976DB}"/>
+                <a16:creationId xmlns:a16="http://schemas.microsoft.com/office/drawing/2014/main" id="{345F837A-2B43-45F8-8ECE-E9D99877D2C7}"/>
               </a:ext>
             </a:extLst>
           </p:cNvPr>
@@ -2865,7 +2865,7 @@
           <p:cNvPr id="10" name="">
             <a:extLst xmlns:a="http://schemas.openxmlformats.org/drawingml/2006/main">
               <a:ext uri="{FF2B5EF4-FFF2-40B4-BE49-F238E27FC236}">
-                <a16:creationId xmlns:a16="http://schemas.microsoft.com/office/drawing/2014/main" id="{82E2C52C-A69D-4F32-B1A4-430FADBCBF9E}"/>
+                <a16:creationId xmlns:a16="http://schemas.microsoft.com/office/drawing/2014/main" id="{3E0747D3-13A5-4EB0-B692-C878B12BAF94}"/>
               </a:ext>
             </a:extLst>
           </p:cNvPr>
@@ -2922,7 +2922,7 @@
           <p:cNvPr id="11" name="">
             <a:extLst xmlns:a="http://schemas.openxmlformats.org/drawingml/2006/main">
               <a:ext uri="{FF2B5EF4-FFF2-40B4-BE49-F238E27FC236}">
-                <a16:creationId xmlns:a16="http://schemas.microsoft.com/office/drawing/2014/main" id="{51AED928-4CD2-41E0-8C30-596768E2EE9F}"/>
+                <a16:creationId xmlns:a16="http://schemas.microsoft.com/office/drawing/2014/main" id="{04E2CBD2-D85D-4722-9172-D4D538A3D3A5}"/>
               </a:ext>
             </a:extLst>
           </p:cNvPr>
@@ -2979,7 +2979,7 @@
           <p:cNvPr id="12" name="">
             <a:extLst xmlns:a="http://schemas.openxmlformats.org/drawingml/2006/main">
               <a:ext uri="{FF2B5EF4-FFF2-40B4-BE49-F238E27FC236}">
-                <a16:creationId xmlns:a16="http://schemas.microsoft.com/office/drawing/2014/main" id="{A742318B-C9F8-43FF-87B3-64DC839850BC}"/>
+                <a16:creationId xmlns:a16="http://schemas.microsoft.com/office/drawing/2014/main" id="{D33CCBA1-EEC1-463B-952E-FA7A441AF087}"/>
               </a:ext>
             </a:extLst>
           </p:cNvPr>
@@ -3036,7 +3036,7 @@
           <p:cNvPr id="13" name="">
             <a:extLst xmlns:a="http://schemas.openxmlformats.org/drawingml/2006/main">
               <a:ext uri="{FF2B5EF4-FFF2-40B4-BE49-F238E27FC236}">
-                <a16:creationId xmlns:a16="http://schemas.microsoft.com/office/drawing/2014/main" id="{5AF8C68F-AA3D-4746-BAFE-4369D31B2C26}"/>
+                <a16:creationId xmlns:a16="http://schemas.microsoft.com/office/drawing/2014/main" id="{C3674018-AA47-4332-B214-90A1DF9A5481}"/>
               </a:ext>
             </a:extLst>
           </p:cNvPr>
@@ -3091,7 +3091,7 @@
     </p:spTree>
     <p:extLst>
       <p:ext uri="{BB962C8B-B14F-4D97-AF65-F5344CB8AC3E}">
-        <p14:creationId xmlns:p14="http://schemas.microsoft.com/office/powerpoint/2010/main" val="792378193"/>
+        <p14:creationId xmlns:p14="http://schemas.microsoft.com/office/powerpoint/2010/main" val="1969727495"/>
       </p:ext>
     </p:extLst>
   </p:cSld>
@@ -3292,7 +3292,7 @@
           <p:cNvPr id="19" name="">
             <a:extLst xmlns:a="http://schemas.openxmlformats.org/drawingml/2006/main">
               <a:ext uri="{FF2B5EF4-FFF2-40B4-BE49-F238E27FC236}">
-                <a16:creationId xmlns:a16="http://schemas.microsoft.com/office/drawing/2014/main" id="{BFF58F85-4B7D-4102-82C3-1DD6D9A3C191}"/>
+                <a16:creationId xmlns:a16="http://schemas.microsoft.com/office/drawing/2014/main" id="{3258C0CA-CD69-4F74-B8AA-706DEC349137}"/>
               </a:ext>
             </a:extLst>
           </p:cNvPr>
@@ -3324,7 +3324,7 @@
           <p:cNvPr id="2" name="">
             <a:extLst xmlns:a="http://schemas.openxmlformats.org/drawingml/2006/main">
               <a:ext uri="{FF2B5EF4-FFF2-40B4-BE49-F238E27FC236}">
-                <a16:creationId xmlns:a16="http://schemas.microsoft.com/office/drawing/2014/main" id="{23ED325D-7B9C-40B8-B603-F1FE11B5D160}"/>
+                <a16:creationId xmlns:a16="http://schemas.microsoft.com/office/drawing/2014/main" id="{BB898718-3716-4DC1-A29E-D4F4CE640217}"/>
               </a:ext>
             </a:extLst>
           </p:cNvPr>
@@ -3381,7 +3381,7 @@
           <p:cNvPr id="3" name="">
             <a:extLst xmlns:a="http://schemas.openxmlformats.org/drawingml/2006/main">
               <a:ext uri="{FF2B5EF4-FFF2-40B4-BE49-F238E27FC236}">
-                <a16:creationId xmlns:a16="http://schemas.microsoft.com/office/drawing/2014/main" id="{25C8AE28-4392-493F-AB60-042EEA9AF65F}"/>
+                <a16:creationId xmlns:a16="http://schemas.microsoft.com/office/drawing/2014/main" id="{529092D2-0BF8-424D-A2C4-F8CF9DE07998}"/>
               </a:ext>
             </a:extLst>
           </p:cNvPr>
@@ -3413,7 +3413,7 @@
           <p:cNvPr id="4" name="">
             <a:extLst xmlns:a="http://schemas.openxmlformats.org/drawingml/2006/main">
               <a:ext uri="{FF2B5EF4-FFF2-40B4-BE49-F238E27FC236}">
-                <a16:creationId xmlns:a16="http://schemas.microsoft.com/office/drawing/2014/main" id="{13C5EAA7-AA4E-47DF-96D4-0BFAEA381B61}"/>
+                <a16:creationId xmlns:a16="http://schemas.microsoft.com/office/drawing/2014/main" id="{954417DA-1D58-4119-A624-3309294F43F0}"/>
               </a:ext>
             </a:extLst>
           </p:cNvPr>
@@ -3470,7 +3470,7 @@
           <p:cNvPr id="5" name="">
             <a:extLst xmlns:a="http://schemas.openxmlformats.org/drawingml/2006/main">
               <a:ext uri="{FF2B5EF4-FFF2-40B4-BE49-F238E27FC236}">
-                <a16:creationId xmlns:a16="http://schemas.microsoft.com/office/drawing/2014/main" id="{398E46C4-5E19-43CF-9EAA-ED5E39FC6996}"/>
+                <a16:creationId xmlns:a16="http://schemas.microsoft.com/office/drawing/2014/main" id="{8FA37FE6-42FA-4BA4-BBDE-114D9A6C0CE2}"/>
               </a:ext>
             </a:extLst>
           </p:cNvPr>
@@ -3527,7 +3527,7 @@
           <p:cNvPr id="6" name="">
             <a:extLst xmlns:a="http://schemas.openxmlformats.org/drawingml/2006/main">
               <a:ext uri="{FF2B5EF4-FFF2-40B4-BE49-F238E27FC236}">
-                <a16:creationId xmlns:a16="http://schemas.microsoft.com/office/drawing/2014/main" id="{AF16C12B-A331-45DF-BB0F-A6DECEFF8566}"/>
+                <a16:creationId xmlns:a16="http://schemas.microsoft.com/office/drawing/2014/main" id="{43352DEA-ED0B-43B9-92DC-C5C2E25A1BBF}"/>
               </a:ext>
             </a:extLst>
           </p:cNvPr>
@@ -3584,7 +3584,7 @@
           <p:cNvPr id="7" name="">
             <a:extLst xmlns:a="http://schemas.openxmlformats.org/drawingml/2006/main">
               <a:ext uri="{FF2B5EF4-FFF2-40B4-BE49-F238E27FC236}">
-                <a16:creationId xmlns:a16="http://schemas.microsoft.com/office/drawing/2014/main" id="{EA69FC9D-7D91-4387-A224-35CB33EDA981}"/>
+                <a16:creationId xmlns:a16="http://schemas.microsoft.com/office/drawing/2014/main" id="{7B8A1E39-1850-46A6-A50D-9F2BB37C6214}"/>
               </a:ext>
             </a:extLst>
           </p:cNvPr>
@@ -3616,7 +3616,7 @@
           <p:cNvPr id="8" name="">
             <a:extLst xmlns:a="http://schemas.openxmlformats.org/drawingml/2006/main">
               <a:ext uri="{FF2B5EF4-FFF2-40B4-BE49-F238E27FC236}">
-                <a16:creationId xmlns:a16="http://schemas.microsoft.com/office/drawing/2014/main" id="{AB125670-174A-4FC8-A1A2-131B3D9451FF}"/>
+                <a16:creationId xmlns:a16="http://schemas.microsoft.com/office/drawing/2014/main" id="{C066CD23-95F0-447E-BF85-4FAFDE3AE4A9}"/>
               </a:ext>
             </a:extLst>
           </p:cNvPr>
@@ -3673,7 +3673,7 @@
           <p:cNvPr id="9" name="">
             <a:extLst xmlns:a="http://schemas.openxmlformats.org/drawingml/2006/main">
               <a:ext uri="{FF2B5EF4-FFF2-40B4-BE49-F238E27FC236}">
-                <a16:creationId xmlns:a16="http://schemas.microsoft.com/office/drawing/2014/main" id="{D6B5F111-50E3-492B-93F8-4EE9713C62A8}"/>
+                <a16:creationId xmlns:a16="http://schemas.microsoft.com/office/drawing/2014/main" id="{A03DC878-A377-4533-B654-D79A9227911D}"/>
               </a:ext>
             </a:extLst>
           </p:cNvPr>
@@ -3730,7 +3730,7 @@
           <p:cNvPr id="10" name="">
             <a:extLst xmlns:a="http://schemas.openxmlformats.org/drawingml/2006/main">
               <a:ext uri="{FF2B5EF4-FFF2-40B4-BE49-F238E27FC236}">
-                <a16:creationId xmlns:a16="http://schemas.microsoft.com/office/drawing/2014/main" id="{3FD0CC0F-E979-4BCE-A8E4-5CC4677B356F}"/>
+                <a16:creationId xmlns:a16="http://schemas.microsoft.com/office/drawing/2014/main" id="{5565DED9-0E42-4CD1-8751-4E7FAEEB8F58}"/>
               </a:ext>
             </a:extLst>
           </p:cNvPr>
@@ -3787,7 +3787,7 @@
           <p:cNvPr id="11" name="">
             <a:extLst xmlns:a="http://schemas.openxmlformats.org/drawingml/2006/main">
               <a:ext uri="{FF2B5EF4-FFF2-40B4-BE49-F238E27FC236}">
-                <a16:creationId xmlns:a16="http://schemas.microsoft.com/office/drawing/2014/main" id="{FE1081C1-C2E8-4784-9A32-DC85A7E7EDBE}"/>
+                <a16:creationId xmlns:a16="http://schemas.microsoft.com/office/drawing/2014/main" id="{E5E920AB-1ECC-4826-8862-6C69996D0098}"/>
               </a:ext>
             </a:extLst>
           </p:cNvPr>
@@ -3821,7 +3821,7 @@
           <p:cNvPr id="12" name="">
             <a:extLst xmlns:a="http://schemas.openxmlformats.org/drawingml/2006/main">
               <a:ext uri="{FF2B5EF4-FFF2-40B4-BE49-F238E27FC236}">
-                <a16:creationId xmlns:a16="http://schemas.microsoft.com/office/drawing/2014/main" id="{90EEEA78-2AC8-406A-BE4B-747D7817326A}"/>
+                <a16:creationId xmlns:a16="http://schemas.microsoft.com/office/drawing/2014/main" id="{CDBC69E5-0EFD-4FD1-A14B-0110B6632F1D}"/>
               </a:ext>
             </a:extLst>
           </p:cNvPr>
@@ -3878,7 +3878,7 @@
           <p:cNvPr id="13" name="">
             <a:extLst xmlns:a="http://schemas.openxmlformats.org/drawingml/2006/main">
               <a:ext uri="{FF2B5EF4-FFF2-40B4-BE49-F238E27FC236}">
-                <a16:creationId xmlns:a16="http://schemas.microsoft.com/office/drawing/2014/main" id="{9CDBE4D5-32F0-4E83-8DEE-C1A868FF9B28}"/>
+                <a16:creationId xmlns:a16="http://schemas.microsoft.com/office/drawing/2014/main" id="{375B9B9C-E34C-4B63-A3C2-17EEE8317B9C}"/>
               </a:ext>
             </a:extLst>
           </p:cNvPr>
@@ -3935,7 +3935,7 @@
           <p:cNvPr id="14" name="">
             <a:extLst xmlns:a="http://schemas.openxmlformats.org/drawingml/2006/main">
               <a:ext uri="{FF2B5EF4-FFF2-40B4-BE49-F238E27FC236}">
-                <a16:creationId xmlns:a16="http://schemas.microsoft.com/office/drawing/2014/main" id="{6F11F81C-DC50-40F8-BDF1-14C2BC90505B}"/>
+                <a16:creationId xmlns:a16="http://schemas.microsoft.com/office/drawing/2014/main" id="{3C2C06EA-9E8D-4B6C-AB49-9867668BB1F6}"/>
               </a:ext>
             </a:extLst>
           </p:cNvPr>
@@ -3992,7 +3992,7 @@
           <p:cNvPr id="15" name="">
             <a:extLst xmlns:a="http://schemas.openxmlformats.org/drawingml/2006/main">
               <a:ext uri="{FF2B5EF4-FFF2-40B4-BE49-F238E27FC236}">
-                <a16:creationId xmlns:a16="http://schemas.microsoft.com/office/drawing/2014/main" id="{B1097121-F117-4E5E-BFB2-44E666D692D7}"/>
+                <a16:creationId xmlns:a16="http://schemas.microsoft.com/office/drawing/2014/main" id="{54A20386-E511-4D22-98A8-3AE45C3A65C4}"/>
               </a:ext>
             </a:extLst>
           </p:cNvPr>
@@ -4026,7 +4026,7 @@
           <p:cNvPr id="16" name="">
             <a:extLst xmlns:a="http://schemas.openxmlformats.org/drawingml/2006/main">
               <a:ext uri="{FF2B5EF4-FFF2-40B4-BE49-F238E27FC236}">
-                <a16:creationId xmlns:a16="http://schemas.microsoft.com/office/drawing/2014/main" id="{5D8A64AA-68A5-415E-A009-1406E1E4F381}"/>
+                <a16:creationId xmlns:a16="http://schemas.microsoft.com/office/drawing/2014/main" id="{4B4E01DC-EF9B-4E39-8C93-F2B8AB75A14C}"/>
               </a:ext>
             </a:extLst>
           </p:cNvPr>
@@ -4083,7 +4083,7 @@
           <p:cNvPr id="17" name="">
             <a:extLst xmlns:a="http://schemas.openxmlformats.org/drawingml/2006/main">
               <a:ext uri="{FF2B5EF4-FFF2-40B4-BE49-F238E27FC236}">
-                <a16:creationId xmlns:a16="http://schemas.microsoft.com/office/drawing/2014/main" id="{21B081CE-7755-4F79-AB05-91AB12A61183}"/>
+                <a16:creationId xmlns:a16="http://schemas.microsoft.com/office/drawing/2014/main" id="{B8D7C893-21F4-44B3-8B8D-DFDC4AF3C379}"/>
               </a:ext>
             </a:extLst>
           </p:cNvPr>
@@ -4140,7 +4140,7 @@
           <p:cNvPr id="18" name="">
             <a:extLst xmlns:a="http://schemas.openxmlformats.org/drawingml/2006/main">
               <a:ext uri="{FF2B5EF4-FFF2-40B4-BE49-F238E27FC236}">
-                <a16:creationId xmlns:a16="http://schemas.microsoft.com/office/drawing/2014/main" id="{57E669C4-2273-48AA-BEF2-64D5DA8CB24F}"/>
+                <a16:creationId xmlns:a16="http://schemas.microsoft.com/office/drawing/2014/main" id="{A3D3D6FD-4B38-4621-8F9B-6EE7BBCD30C6}"/>
               </a:ext>
             </a:extLst>
           </p:cNvPr>
@@ -4195,7 +4195,7 @@
     </p:spTree>
     <p:extLst>
       <p:ext uri="{BB962C8B-B14F-4D97-AF65-F5344CB8AC3E}">
-        <p14:creationId xmlns:p14="http://schemas.microsoft.com/office/powerpoint/2010/main" val="319599091"/>
+        <p14:creationId xmlns:p14="http://schemas.microsoft.com/office/powerpoint/2010/main" val="1683483437"/>
       </p:ext>
     </p:extLst>
   </p:cSld>
@@ -4350,7 +4350,7 @@
           <p:cNvPr id="23" name="">
             <a:extLst xmlns:a="http://schemas.openxmlformats.org/drawingml/2006/main">
               <a:ext uri="{FF2B5EF4-FFF2-40B4-BE49-F238E27FC236}">
-                <a16:creationId xmlns:a16="http://schemas.microsoft.com/office/drawing/2014/main" id="{851373A1-03A1-4130-BAC5-F4EA0C0DC805}"/>
+                <a16:creationId xmlns:a16="http://schemas.microsoft.com/office/drawing/2014/main" id="{F0C610DB-B2DA-486C-9013-19A8170BF6A7}"/>
               </a:ext>
             </a:extLst>
           </p:cNvPr>
@@ -4382,7 +4382,7 @@
           <p:cNvPr id="2" name="">
             <a:extLst xmlns:a="http://schemas.openxmlformats.org/drawingml/2006/main">
               <a:ext uri="{FF2B5EF4-FFF2-40B4-BE49-F238E27FC236}">
-                <a16:creationId xmlns:a16="http://schemas.microsoft.com/office/drawing/2014/main" id="{92923D52-8665-402E-AFB3-D171133D2DC1}"/>
+                <a16:creationId xmlns:a16="http://schemas.microsoft.com/office/drawing/2014/main" id="{91F3AF95-9A48-411B-ADDB-2F533D76B47E}"/>
               </a:ext>
             </a:extLst>
           </p:cNvPr>
@@ -4439,7 +4439,7 @@
           <p:cNvPr id="3" name="">
             <a:extLst xmlns:a="http://schemas.openxmlformats.org/drawingml/2006/main">
               <a:ext uri="{FF2B5EF4-FFF2-40B4-BE49-F238E27FC236}">
-                <a16:creationId xmlns:a16="http://schemas.microsoft.com/office/drawing/2014/main" id="{6889F688-46E3-4155-9CF9-C0DEF8608A12}"/>
+                <a16:creationId xmlns:a16="http://schemas.microsoft.com/office/drawing/2014/main" id="{0C3A3926-B82E-45A7-A475-8DF3A5C8EE25}"/>
               </a:ext>
             </a:extLst>
           </p:cNvPr>
@@ -4471,7 +4471,7 @@
           <p:cNvPr id="4" name="">
             <a:extLst xmlns:a="http://schemas.openxmlformats.org/drawingml/2006/main">
               <a:ext uri="{FF2B5EF4-FFF2-40B4-BE49-F238E27FC236}">
-                <a16:creationId xmlns:a16="http://schemas.microsoft.com/office/drawing/2014/main" id="{82BE59D4-DE84-4DA1-8BF7-BFFA457D1D2B}"/>
+                <a16:creationId xmlns:a16="http://schemas.microsoft.com/office/drawing/2014/main" id="{90FC29C6-8B89-4A84-A25C-61476FEB5F28}"/>
               </a:ext>
             </a:extLst>
           </p:cNvPr>
@@ -4528,7 +4528,7 @@
           <p:cNvPr id="5" name="">
             <a:extLst xmlns:a="http://schemas.openxmlformats.org/drawingml/2006/main">
               <a:ext uri="{FF2B5EF4-FFF2-40B4-BE49-F238E27FC236}">
-                <a16:creationId xmlns:a16="http://schemas.microsoft.com/office/drawing/2014/main" id="{600D374E-E7E6-4901-AD26-6EB6AD6AAE5B}"/>
+                <a16:creationId xmlns:a16="http://schemas.microsoft.com/office/drawing/2014/main" id="{5EB573BC-B41B-4377-A74C-1364BBFBAE33}"/>
               </a:ext>
             </a:extLst>
           </p:cNvPr>
@@ -4585,7 +4585,7 @@
           <p:cNvPr id="6" name="">
             <a:extLst xmlns:a="http://schemas.openxmlformats.org/drawingml/2006/main">
               <a:ext uri="{FF2B5EF4-FFF2-40B4-BE49-F238E27FC236}">
-                <a16:creationId xmlns:a16="http://schemas.microsoft.com/office/drawing/2014/main" id="{78E990F3-32DC-490F-B651-62133AC24055}"/>
+                <a16:creationId xmlns:a16="http://schemas.microsoft.com/office/drawing/2014/main" id="{D57A20C4-972E-4C3A-8147-9876EE22C938}"/>
               </a:ext>
             </a:extLst>
           </p:cNvPr>
@@ -4642,7 +4642,7 @@
           <p:cNvPr id="7" name="">
             <a:extLst xmlns:a="http://schemas.openxmlformats.org/drawingml/2006/main">
               <a:ext uri="{FF2B5EF4-FFF2-40B4-BE49-F238E27FC236}">
-                <a16:creationId xmlns:a16="http://schemas.microsoft.com/office/drawing/2014/main" id="{4A2E21F8-E166-4CF6-AD3A-4474E7DEF7B8}"/>
+                <a16:creationId xmlns:a16="http://schemas.microsoft.com/office/drawing/2014/main" id="{57F8884D-E286-4820-BD5E-7CD0EC166DD4}"/>
               </a:ext>
             </a:extLst>
           </p:cNvPr>
@@ -4674,7 +4674,7 @@
           <p:cNvPr id="8" name="">
             <a:extLst xmlns:a="http://schemas.openxmlformats.org/drawingml/2006/main">
               <a:ext uri="{FF2B5EF4-FFF2-40B4-BE49-F238E27FC236}">
-                <a16:creationId xmlns:a16="http://schemas.microsoft.com/office/drawing/2014/main" id="{7119DBDE-5E66-4138-AD1A-1293E141C935}"/>
+                <a16:creationId xmlns:a16="http://schemas.microsoft.com/office/drawing/2014/main" id="{1F9283DE-F735-49D3-BF4B-B72413544FC9}"/>
               </a:ext>
             </a:extLst>
           </p:cNvPr>
@@ -4731,7 +4731,7 @@
           <p:cNvPr id="9" name="">
             <a:extLst xmlns:a="http://schemas.openxmlformats.org/drawingml/2006/main">
               <a:ext uri="{FF2B5EF4-FFF2-40B4-BE49-F238E27FC236}">
-                <a16:creationId xmlns:a16="http://schemas.microsoft.com/office/drawing/2014/main" id="{ACA0CF4F-9130-4576-8B37-6B0CEF4E584F}"/>
+                <a16:creationId xmlns:a16="http://schemas.microsoft.com/office/drawing/2014/main" id="{D0CB2C25-25BB-452A-A19B-F950A151BA3C}"/>
               </a:ext>
             </a:extLst>
           </p:cNvPr>
@@ -4788,7 +4788,7 @@
           <p:cNvPr id="10" name="">
             <a:extLst xmlns:a="http://schemas.openxmlformats.org/drawingml/2006/main">
               <a:ext uri="{FF2B5EF4-FFF2-40B4-BE49-F238E27FC236}">
-                <a16:creationId xmlns:a16="http://schemas.microsoft.com/office/drawing/2014/main" id="{88FB45E6-BF8B-490B-9932-214152FC959B}"/>
+                <a16:creationId xmlns:a16="http://schemas.microsoft.com/office/drawing/2014/main" id="{16DEA10B-E336-4380-9BBA-7CFFAEB11357}"/>
               </a:ext>
             </a:extLst>
           </p:cNvPr>
@@ -4822,7 +4822,7 @@
           <p:cNvPr id="11" name="">
             <a:extLst xmlns:a="http://schemas.openxmlformats.org/drawingml/2006/main">
               <a:ext uri="{FF2B5EF4-FFF2-40B4-BE49-F238E27FC236}">
-                <a16:creationId xmlns:a16="http://schemas.microsoft.com/office/drawing/2014/main" id="{12566D89-CDC1-4998-9744-A7519824CEFC}"/>
+                <a16:creationId xmlns:a16="http://schemas.microsoft.com/office/drawing/2014/main" id="{DC2C6AD2-680B-4B7D-AD48-97D44EE9BEB1}"/>
               </a:ext>
             </a:extLst>
           </p:cNvPr>
@@ -4854,7 +4854,7 @@
           <p:cNvPr id="12" name="">
             <a:extLst xmlns:a="http://schemas.openxmlformats.org/drawingml/2006/main">
               <a:ext uri="{FF2B5EF4-FFF2-40B4-BE49-F238E27FC236}">
-                <a16:creationId xmlns:a16="http://schemas.microsoft.com/office/drawing/2014/main" id="{89E892E6-F50A-49F6-AD86-553D8B84B2B6}"/>
+                <a16:creationId xmlns:a16="http://schemas.microsoft.com/office/drawing/2014/main" id="{869EB9D0-5749-4864-BBE8-2818820702D0}"/>
               </a:ext>
             </a:extLst>
           </p:cNvPr>
@@ -4911,7 +4911,7 @@
           <p:cNvPr id="13" name="">
             <a:extLst xmlns:a="http://schemas.openxmlformats.org/drawingml/2006/main">
               <a:ext uri="{FF2B5EF4-FFF2-40B4-BE49-F238E27FC236}">
-                <a16:creationId xmlns:a16="http://schemas.microsoft.com/office/drawing/2014/main" id="{06E2F28A-5774-4DC3-A5F5-E767D5F3BEA8}"/>
+                <a16:creationId xmlns:a16="http://schemas.microsoft.com/office/drawing/2014/main" id="{318FB16E-9724-4314-A70F-C4B6AA6DDB0A}"/>
               </a:ext>
             </a:extLst>
           </p:cNvPr>
@@ -4968,7 +4968,7 @@
           <p:cNvPr id="14" name="">
             <a:extLst xmlns:a="http://schemas.openxmlformats.org/drawingml/2006/main">
               <a:ext uri="{FF2B5EF4-FFF2-40B4-BE49-F238E27FC236}">
-                <a16:creationId xmlns:a16="http://schemas.microsoft.com/office/drawing/2014/main" id="{595D7C2F-7325-4074-967C-06A378D30683}"/>
+                <a16:creationId xmlns:a16="http://schemas.microsoft.com/office/drawing/2014/main" id="{A4CCF802-70F6-4DFE-B0D8-AAA984254A90}"/>
               </a:ext>
             </a:extLst>
           </p:cNvPr>
@@ -5002,7 +5002,7 @@
           <p:cNvPr id="15" name="">
             <a:extLst xmlns:a="http://schemas.openxmlformats.org/drawingml/2006/main">
               <a:ext uri="{FF2B5EF4-FFF2-40B4-BE49-F238E27FC236}">
-                <a16:creationId xmlns:a16="http://schemas.microsoft.com/office/drawing/2014/main" id="{ADDA341D-8B95-4D57-8B3A-7FFD7AD5C392}"/>
+                <a16:creationId xmlns:a16="http://schemas.microsoft.com/office/drawing/2014/main" id="{FC80406B-232B-430C-B901-4D997FB79A7C}"/>
               </a:ext>
             </a:extLst>
           </p:cNvPr>
@@ -5034,7 +5034,7 @@
           <p:cNvPr id="16" name="">
             <a:extLst xmlns:a="http://schemas.openxmlformats.org/drawingml/2006/main">
               <a:ext uri="{FF2B5EF4-FFF2-40B4-BE49-F238E27FC236}">
-                <a16:creationId xmlns:a16="http://schemas.microsoft.com/office/drawing/2014/main" id="{F64FDDD2-EDC5-4EC5-8E5B-4368EF077C08}"/>
+                <a16:creationId xmlns:a16="http://schemas.microsoft.com/office/drawing/2014/main" id="{AB47D8FB-BE83-4122-B6FC-F33B629A1EF3}"/>
               </a:ext>
             </a:extLst>
           </p:cNvPr>
@@ -5091,7 +5091,7 @@
           <p:cNvPr id="17" name="">
             <a:extLst xmlns:a="http://schemas.openxmlformats.org/drawingml/2006/main">
               <a:ext uri="{FF2B5EF4-FFF2-40B4-BE49-F238E27FC236}">
-                <a16:creationId xmlns:a16="http://schemas.microsoft.com/office/drawing/2014/main" id="{BCC9E9BF-559C-47A5-87AF-4DBC679691FD}"/>
+                <a16:creationId xmlns:a16="http://schemas.microsoft.com/office/drawing/2014/main" id="{0F49F1CE-8794-44E1-9DB9-E9360BC6E9B6}"/>
               </a:ext>
             </a:extLst>
           </p:cNvPr>
@@ -5148,7 +5148,7 @@
           <p:cNvPr id="18" name="">
             <a:extLst xmlns:a="http://schemas.openxmlformats.org/drawingml/2006/main">
               <a:ext uri="{FF2B5EF4-FFF2-40B4-BE49-F238E27FC236}">
-                <a16:creationId xmlns:a16="http://schemas.microsoft.com/office/drawing/2014/main" id="{6FFFCF58-88B8-4A08-AFE6-92CF6260FE18}"/>
+                <a16:creationId xmlns:a16="http://schemas.microsoft.com/office/drawing/2014/main" id="{1B37DC45-7DFD-4DCE-ABA1-0A46F10AE0F1}"/>
               </a:ext>
             </a:extLst>
           </p:cNvPr>
@@ -5182,7 +5182,7 @@
           <p:cNvPr id="19" name="">
             <a:extLst xmlns:a="http://schemas.openxmlformats.org/drawingml/2006/main">
               <a:ext uri="{FF2B5EF4-FFF2-40B4-BE49-F238E27FC236}">
-                <a16:creationId xmlns:a16="http://schemas.microsoft.com/office/drawing/2014/main" id="{1E61B619-31D2-47B1-8533-DE48030F8D82}"/>
+                <a16:creationId xmlns:a16="http://schemas.microsoft.com/office/drawing/2014/main" id="{7796D56E-18E2-496C-B47F-3B176298005A}"/>
               </a:ext>
             </a:extLst>
           </p:cNvPr>
@@ -5214,7 +5214,7 @@
           <p:cNvPr id="20" name="">
             <a:extLst xmlns:a="http://schemas.openxmlformats.org/drawingml/2006/main">
               <a:ext uri="{FF2B5EF4-FFF2-40B4-BE49-F238E27FC236}">
-                <a16:creationId xmlns:a16="http://schemas.microsoft.com/office/drawing/2014/main" id="{1DA80AB8-1F4A-4EB7-8767-D1704ACC849E}"/>
+                <a16:creationId xmlns:a16="http://schemas.microsoft.com/office/drawing/2014/main" id="{1FE18136-B20A-4C91-AD5D-8E26D8F8506B}"/>
               </a:ext>
             </a:extLst>
           </p:cNvPr>
@@ -5271,7 +5271,7 @@
           <p:cNvPr id="21" name="">
             <a:extLst xmlns:a="http://schemas.openxmlformats.org/drawingml/2006/main">
               <a:ext uri="{FF2B5EF4-FFF2-40B4-BE49-F238E27FC236}">
-                <a16:creationId xmlns:a16="http://schemas.microsoft.com/office/drawing/2014/main" id="{914EEF00-2899-4C4A-94FF-F9DA14DE111D}"/>
+                <a16:creationId xmlns:a16="http://schemas.microsoft.com/office/drawing/2014/main" id="{F05F219A-CDD8-4380-9E71-263595073F99}"/>
               </a:ext>
             </a:extLst>
           </p:cNvPr>
@@ -5328,7 +5328,7 @@
           <p:cNvPr id="22" name="">
             <a:extLst xmlns:a="http://schemas.openxmlformats.org/drawingml/2006/main">
               <a:ext uri="{FF2B5EF4-FFF2-40B4-BE49-F238E27FC236}">
-                <a16:creationId xmlns:a16="http://schemas.microsoft.com/office/drawing/2014/main" id="{BC638B78-0787-4529-BBC4-427CCA67A0B6}"/>
+                <a16:creationId xmlns:a16="http://schemas.microsoft.com/office/drawing/2014/main" id="{1138DE20-5C83-48EE-A56A-AA5D88A16F54}"/>
               </a:ext>
             </a:extLst>
           </p:cNvPr>
@@ -5383,7 +5383,7 @@
     </p:spTree>
     <p:extLst>
       <p:ext uri="{BB962C8B-B14F-4D97-AF65-F5344CB8AC3E}">
-        <p14:creationId xmlns:p14="http://schemas.microsoft.com/office/powerpoint/2010/main" val="27616379"/>
+        <p14:creationId xmlns:p14="http://schemas.microsoft.com/office/powerpoint/2010/main" val="276861955"/>
       </p:ext>
     </p:extLst>
   </p:cSld>
@@ -5584,7 +5584,7 @@
           <p:cNvPr id="23" name="">
             <a:extLst xmlns:a="http://schemas.openxmlformats.org/drawingml/2006/main">
               <a:ext uri="{FF2B5EF4-FFF2-40B4-BE49-F238E27FC236}">
-                <a16:creationId xmlns:a16="http://schemas.microsoft.com/office/drawing/2014/main" id="{9BF85DCF-47E2-45B9-A70E-4600317658C9}"/>
+                <a16:creationId xmlns:a16="http://schemas.microsoft.com/office/drawing/2014/main" id="{368E56E3-E3D6-451D-BF2E-96D2A7BA8921}"/>
               </a:ext>
             </a:extLst>
           </p:cNvPr>
@@ -5616,7 +5616,7 @@
           <p:cNvPr id="2" name="">
             <a:extLst xmlns:a="http://schemas.openxmlformats.org/drawingml/2006/main">
               <a:ext uri="{FF2B5EF4-FFF2-40B4-BE49-F238E27FC236}">
-                <a16:creationId xmlns:a16="http://schemas.microsoft.com/office/drawing/2014/main" id="{73C6F040-1CC6-4821-B102-86D4C04164E4}"/>
+                <a16:creationId xmlns:a16="http://schemas.microsoft.com/office/drawing/2014/main" id="{94F6C7E9-94D5-4758-8850-4B5995500FCE}"/>
               </a:ext>
             </a:extLst>
           </p:cNvPr>
@@ -5673,7 +5673,7 @@
           <p:cNvPr id="3" name="">
             <a:extLst xmlns:a="http://schemas.openxmlformats.org/drawingml/2006/main">
               <a:ext uri="{FF2B5EF4-FFF2-40B4-BE49-F238E27FC236}">
-                <a16:creationId xmlns:a16="http://schemas.microsoft.com/office/drawing/2014/main" id="{FAC1746D-3233-4329-B0F4-A2F47E5B8FA6}"/>
+                <a16:creationId xmlns:a16="http://schemas.microsoft.com/office/drawing/2014/main" id="{1A50278D-5707-422D-BB90-DF2EA023E6C1}"/>
               </a:ext>
             </a:extLst>
           </p:cNvPr>
@@ -5705,7 +5705,7 @@
           <p:cNvPr id="4" name="">
             <a:extLst xmlns:a="http://schemas.openxmlformats.org/drawingml/2006/main">
               <a:ext uri="{FF2B5EF4-FFF2-40B4-BE49-F238E27FC236}">
-                <a16:creationId xmlns:a16="http://schemas.microsoft.com/office/drawing/2014/main" id="{A5EE20EC-20C9-460E-847A-4DC87ED7A652}"/>
+                <a16:creationId xmlns:a16="http://schemas.microsoft.com/office/drawing/2014/main" id="{6FBAF9CA-A5F6-4B84-A459-1DE8AC8DB00C}"/>
               </a:ext>
             </a:extLst>
           </p:cNvPr>
@@ -5762,7 +5762,7 @@
           <p:cNvPr id="5" name="">
             <a:extLst xmlns:a="http://schemas.openxmlformats.org/drawingml/2006/main">
               <a:ext uri="{FF2B5EF4-FFF2-40B4-BE49-F238E27FC236}">
-                <a16:creationId xmlns:a16="http://schemas.microsoft.com/office/drawing/2014/main" id="{6EF11A41-DE62-4C66-AC63-5D005D4168FF}"/>
+                <a16:creationId xmlns:a16="http://schemas.microsoft.com/office/drawing/2014/main" id="{B2B7700C-7DF9-4947-BE5C-AAFB6E550527}"/>
               </a:ext>
             </a:extLst>
           </p:cNvPr>
@@ -5819,7 +5819,7 @@
           <p:cNvPr id="6" name="">
             <a:extLst xmlns:a="http://schemas.openxmlformats.org/drawingml/2006/main">
               <a:ext uri="{FF2B5EF4-FFF2-40B4-BE49-F238E27FC236}">
-                <a16:creationId xmlns:a16="http://schemas.microsoft.com/office/drawing/2014/main" id="{CDCBE644-C5C0-4683-BE37-C9E6A5F6E6A7}"/>
+                <a16:creationId xmlns:a16="http://schemas.microsoft.com/office/drawing/2014/main" id="{2DB37365-6050-45F5-AFBC-3B136C356549}"/>
               </a:ext>
             </a:extLst>
           </p:cNvPr>
@@ -5876,7 +5876,7 @@
           <p:cNvPr id="7" name="">
             <a:extLst xmlns:a="http://schemas.openxmlformats.org/drawingml/2006/main">
               <a:ext uri="{FF2B5EF4-FFF2-40B4-BE49-F238E27FC236}">
-                <a16:creationId xmlns:a16="http://schemas.microsoft.com/office/drawing/2014/main" id="{752BBA83-D7A4-4E7E-A39C-2D84041D4AFE}"/>
+                <a16:creationId xmlns:a16="http://schemas.microsoft.com/office/drawing/2014/main" id="{DF38D866-B3E0-455E-9FE2-36DEC1D3F3B8}"/>
               </a:ext>
             </a:extLst>
           </p:cNvPr>
@@ -5908,7 +5908,7 @@
           <p:cNvPr id="8" name="">
             <a:extLst xmlns:a="http://schemas.openxmlformats.org/drawingml/2006/main">
               <a:ext uri="{FF2B5EF4-FFF2-40B4-BE49-F238E27FC236}">
-                <a16:creationId xmlns:a16="http://schemas.microsoft.com/office/drawing/2014/main" id="{517C3643-6E4B-4C62-BEEA-C775C0EEEDF1}"/>
+                <a16:creationId xmlns:a16="http://schemas.microsoft.com/office/drawing/2014/main" id="{1EE5431B-BA57-4445-B471-7D6E338CC25F}"/>
               </a:ext>
             </a:extLst>
           </p:cNvPr>
@@ -5965,7 +5965,7 @@
           <p:cNvPr id="9" name="">
             <a:extLst xmlns:a="http://schemas.openxmlformats.org/drawingml/2006/main">
               <a:ext uri="{FF2B5EF4-FFF2-40B4-BE49-F238E27FC236}">
-                <a16:creationId xmlns:a16="http://schemas.microsoft.com/office/drawing/2014/main" id="{48C90005-A745-4EE1-988C-7652B51D9CCD}"/>
+                <a16:creationId xmlns:a16="http://schemas.microsoft.com/office/drawing/2014/main" id="{03D8846B-F8E3-4159-BCD2-3F7C9BBDEEE2}"/>
               </a:ext>
             </a:extLst>
           </p:cNvPr>
@@ -6022,7 +6022,7 @@
           <p:cNvPr id="10" name="">
             <a:extLst xmlns:a="http://schemas.openxmlformats.org/drawingml/2006/main">
               <a:ext uri="{FF2B5EF4-FFF2-40B4-BE49-F238E27FC236}">
-                <a16:creationId xmlns:a16="http://schemas.microsoft.com/office/drawing/2014/main" id="{528873C3-BB3B-49FC-B359-9287C5302948}"/>
+                <a16:creationId xmlns:a16="http://schemas.microsoft.com/office/drawing/2014/main" id="{9C83CE33-1F78-44E2-B465-977FE5877597}"/>
               </a:ext>
             </a:extLst>
           </p:cNvPr>
@@ -6056,7 +6056,7 @@
           <p:cNvPr id="11" name="">
             <a:extLst xmlns:a="http://schemas.openxmlformats.org/drawingml/2006/main">
               <a:ext uri="{FF2B5EF4-FFF2-40B4-BE49-F238E27FC236}">
-                <a16:creationId xmlns:a16="http://schemas.microsoft.com/office/drawing/2014/main" id="{BDAB51C0-A00E-4895-821F-C5CF175B1655}"/>
+                <a16:creationId xmlns:a16="http://schemas.microsoft.com/office/drawing/2014/main" id="{B89DF10B-FF39-4908-9EE4-736C48F1F1E6}"/>
               </a:ext>
             </a:extLst>
           </p:cNvPr>
@@ -6088,7 +6088,7 @@
           <p:cNvPr id="12" name="">
             <a:extLst xmlns:a="http://schemas.openxmlformats.org/drawingml/2006/main">
               <a:ext uri="{FF2B5EF4-FFF2-40B4-BE49-F238E27FC236}">
-                <a16:creationId xmlns:a16="http://schemas.microsoft.com/office/drawing/2014/main" id="{725A3B52-B1C4-45ED-B28C-04470FF08AF6}"/>
+                <a16:creationId xmlns:a16="http://schemas.microsoft.com/office/drawing/2014/main" id="{0D0797BC-34D6-4F0B-9295-2222B2CB33AE}"/>
               </a:ext>
             </a:extLst>
           </p:cNvPr>
@@ -6145,7 +6145,7 @@
           <p:cNvPr id="13" name="">
             <a:extLst xmlns:a="http://schemas.openxmlformats.org/drawingml/2006/main">
               <a:ext uri="{FF2B5EF4-FFF2-40B4-BE49-F238E27FC236}">
-                <a16:creationId xmlns:a16="http://schemas.microsoft.com/office/drawing/2014/main" id="{0CE5115E-6BD4-459F-AF61-3A50AAA06C09}"/>
+                <a16:creationId xmlns:a16="http://schemas.microsoft.com/office/drawing/2014/main" id="{32E7FF9E-8C75-4496-A0BD-C2D26C1065BF}"/>
               </a:ext>
             </a:extLst>
           </p:cNvPr>
@@ -6202,7 +6202,7 @@
           <p:cNvPr id="14" name="">
             <a:extLst xmlns:a="http://schemas.openxmlformats.org/drawingml/2006/main">
               <a:ext uri="{FF2B5EF4-FFF2-40B4-BE49-F238E27FC236}">
-                <a16:creationId xmlns:a16="http://schemas.microsoft.com/office/drawing/2014/main" id="{224C35BE-1198-4BE4-BF43-9D085B78AAF4}"/>
+                <a16:creationId xmlns:a16="http://schemas.microsoft.com/office/drawing/2014/main" id="{C2255429-C8B4-40A7-B6FD-30C3D9A3EF26}"/>
               </a:ext>
             </a:extLst>
           </p:cNvPr>
@@ -6236,7 +6236,7 @@
           <p:cNvPr id="15" name="">
             <a:extLst xmlns:a="http://schemas.openxmlformats.org/drawingml/2006/main">
               <a:ext uri="{FF2B5EF4-FFF2-40B4-BE49-F238E27FC236}">
-                <a16:creationId xmlns:a16="http://schemas.microsoft.com/office/drawing/2014/main" id="{84C93286-ABBC-443C-BEC8-DD9FD2B92129}"/>
+                <a16:creationId xmlns:a16="http://schemas.microsoft.com/office/drawing/2014/main" id="{8F8FA015-9CC6-4CC8-A6B6-31F35F093D8C}"/>
               </a:ext>
             </a:extLst>
           </p:cNvPr>
@@ -6268,7 +6268,7 @@
           <p:cNvPr id="16" name="">
             <a:extLst xmlns:a="http://schemas.openxmlformats.org/drawingml/2006/main">
               <a:ext uri="{FF2B5EF4-FFF2-40B4-BE49-F238E27FC236}">
-                <a16:creationId xmlns:a16="http://schemas.microsoft.com/office/drawing/2014/main" id="{47172C4A-DFCA-4040-8498-510F7E545493}"/>
+                <a16:creationId xmlns:a16="http://schemas.microsoft.com/office/drawing/2014/main" id="{EE1B9CC7-6FF5-4015-A566-90932FA53731}"/>
               </a:ext>
             </a:extLst>
           </p:cNvPr>
@@ -6325,7 +6325,7 @@
           <p:cNvPr id="17" name="">
             <a:extLst xmlns:a="http://schemas.openxmlformats.org/drawingml/2006/main">
               <a:ext uri="{FF2B5EF4-FFF2-40B4-BE49-F238E27FC236}">
-                <a16:creationId xmlns:a16="http://schemas.microsoft.com/office/drawing/2014/main" id="{0AA19487-9BF3-42F9-806C-2083E608E1DB}"/>
+                <a16:creationId xmlns:a16="http://schemas.microsoft.com/office/drawing/2014/main" id="{4E8ED0B6-DEDA-4C9F-BC74-63F3B8C79C51}"/>
               </a:ext>
             </a:extLst>
           </p:cNvPr>
@@ -6382,7 +6382,7 @@
           <p:cNvPr id="18" name="">
             <a:extLst xmlns:a="http://schemas.openxmlformats.org/drawingml/2006/main">
               <a:ext uri="{FF2B5EF4-FFF2-40B4-BE49-F238E27FC236}">
-                <a16:creationId xmlns:a16="http://schemas.microsoft.com/office/drawing/2014/main" id="{D3755475-FD30-4746-BF2D-BB952799D6C6}"/>
+                <a16:creationId xmlns:a16="http://schemas.microsoft.com/office/drawing/2014/main" id="{A1D7CC0D-A746-48BD-873E-1B0CF6F5CF99}"/>
               </a:ext>
             </a:extLst>
           </p:cNvPr>
@@ -6416,7 +6416,7 @@
           <p:cNvPr id="19" name="">
             <a:extLst xmlns:a="http://schemas.openxmlformats.org/drawingml/2006/main">
               <a:ext uri="{FF2B5EF4-FFF2-40B4-BE49-F238E27FC236}">
-                <a16:creationId xmlns:a16="http://schemas.microsoft.com/office/drawing/2014/main" id="{70E043CF-E2C1-4178-9434-AA9373D2FBCC}"/>
+                <a16:creationId xmlns:a16="http://schemas.microsoft.com/office/drawing/2014/main" id="{CAFE9831-77CF-4974-8F6B-EB502BB0EA18}"/>
               </a:ext>
             </a:extLst>
           </p:cNvPr>
@@ -6448,7 +6448,7 @@
           <p:cNvPr id="20" name="">
             <a:extLst xmlns:a="http://schemas.openxmlformats.org/drawingml/2006/main">
               <a:ext uri="{FF2B5EF4-FFF2-40B4-BE49-F238E27FC236}">
-                <a16:creationId xmlns:a16="http://schemas.microsoft.com/office/drawing/2014/main" id="{E6F25FEE-6B97-4730-94B4-D11D7E1FB68A}"/>
+                <a16:creationId xmlns:a16="http://schemas.microsoft.com/office/drawing/2014/main" id="{D210D325-B54E-4CBF-B2C8-2C1B3A45CB07}"/>
               </a:ext>
             </a:extLst>
           </p:cNvPr>
@@ -6505,7 +6505,7 @@
           <p:cNvPr id="21" name="">
             <a:extLst xmlns:a="http://schemas.openxmlformats.org/drawingml/2006/main">
               <a:ext uri="{FF2B5EF4-FFF2-40B4-BE49-F238E27FC236}">
-                <a16:creationId xmlns:a16="http://schemas.microsoft.com/office/drawing/2014/main" id="{2CEF68BA-414D-4E09-AF57-E547644EA389}"/>
+                <a16:creationId xmlns:a16="http://schemas.microsoft.com/office/drawing/2014/main" id="{70F28FA5-0AA0-41A3-8EB3-59713A7BA5C3}"/>
               </a:ext>
             </a:extLst>
           </p:cNvPr>
@@ -6562,7 +6562,7 @@
           <p:cNvPr id="22" name="">
             <a:extLst xmlns:a="http://schemas.openxmlformats.org/drawingml/2006/main">
               <a:ext uri="{FF2B5EF4-FFF2-40B4-BE49-F238E27FC236}">
-                <a16:creationId xmlns:a16="http://schemas.microsoft.com/office/drawing/2014/main" id="{F02D3BCD-506A-4133-94BA-DDDA54DB009D}"/>
+                <a16:creationId xmlns:a16="http://schemas.microsoft.com/office/drawing/2014/main" id="{5556F6D9-D11F-48AA-9F07-3CC221585A89}"/>
               </a:ext>
             </a:extLst>
           </p:cNvPr>
@@ -6617,7 +6617,7 @@
     </p:spTree>
     <p:extLst>
       <p:ext uri="{BB962C8B-B14F-4D97-AF65-F5344CB8AC3E}">
-        <p14:creationId xmlns:p14="http://schemas.microsoft.com/office/powerpoint/2010/main" val="969039225"/>
+        <p14:creationId xmlns:p14="http://schemas.microsoft.com/office/powerpoint/2010/main" val="1860043479"/>
       </p:ext>
     </p:extLst>
   </p:cSld>
@@ -6818,7 +6818,7 @@
           <p:cNvPr id="16" name="">
             <a:extLst xmlns:a="http://schemas.openxmlformats.org/drawingml/2006/main">
               <a:ext uri="{FF2B5EF4-FFF2-40B4-BE49-F238E27FC236}">
-                <a16:creationId xmlns:a16="http://schemas.microsoft.com/office/drawing/2014/main" id="{7B7EC870-A5A4-4A17-A442-ED1DBF3ED334}"/>
+                <a16:creationId xmlns:a16="http://schemas.microsoft.com/office/drawing/2014/main" id="{493746BC-2BC4-43A4-A9A5-8CF992D04586}"/>
               </a:ext>
             </a:extLst>
           </p:cNvPr>
@@ -6850,7 +6850,7 @@
           <p:cNvPr id="2" name="">
             <a:extLst xmlns:a="http://schemas.openxmlformats.org/drawingml/2006/main">
               <a:ext uri="{FF2B5EF4-FFF2-40B4-BE49-F238E27FC236}">
-                <a16:creationId xmlns:a16="http://schemas.microsoft.com/office/drawing/2014/main" id="{5B8FC338-0E00-4F20-9557-F84CBD50A693}"/>
+                <a16:creationId xmlns:a16="http://schemas.microsoft.com/office/drawing/2014/main" id="{18FFD7CB-7F5C-4462-86BB-ACBA2534B7D5}"/>
               </a:ext>
             </a:extLst>
           </p:cNvPr>
@@ -6907,7 +6907,7 @@
           <p:cNvPr id="3" name="">
             <a:extLst xmlns:a="http://schemas.openxmlformats.org/drawingml/2006/main">
               <a:ext uri="{FF2B5EF4-FFF2-40B4-BE49-F238E27FC236}">
-                <a16:creationId xmlns:a16="http://schemas.microsoft.com/office/drawing/2014/main" id="{2C5C189F-A7EE-4A26-AE1B-9E0524A19569}"/>
+                <a16:creationId xmlns:a16="http://schemas.microsoft.com/office/drawing/2014/main" id="{9EC08284-B19E-4330-AA71-F7CCAA4EC633}"/>
               </a:ext>
             </a:extLst>
           </p:cNvPr>
@@ -6939,7 +6939,7 @@
           <p:cNvPr id="4" name="">
             <a:extLst xmlns:a="http://schemas.openxmlformats.org/drawingml/2006/main">
               <a:ext uri="{FF2B5EF4-FFF2-40B4-BE49-F238E27FC236}">
-                <a16:creationId xmlns:a16="http://schemas.microsoft.com/office/drawing/2014/main" id="{105E8768-A9D7-4179-970E-3D6BC2134372}"/>
+                <a16:creationId xmlns:a16="http://schemas.microsoft.com/office/drawing/2014/main" id="{9EFCCB9F-A3FE-4862-A8B2-941385FBD236}"/>
               </a:ext>
             </a:extLst>
           </p:cNvPr>
@@ -6996,7 +6996,7 @@
           <p:cNvPr id="5" name="">
             <a:extLst xmlns:a="http://schemas.openxmlformats.org/drawingml/2006/main">
               <a:ext uri="{FF2B5EF4-FFF2-40B4-BE49-F238E27FC236}">
-                <a16:creationId xmlns:a16="http://schemas.microsoft.com/office/drawing/2014/main" id="{3DE961B5-EAD9-4C22-9F3E-46F6AD97048D}"/>
+                <a16:creationId xmlns:a16="http://schemas.microsoft.com/office/drawing/2014/main" id="{730C442E-F268-4183-B584-2BBABB70646E}"/>
               </a:ext>
             </a:extLst>
           </p:cNvPr>
@@ -7053,7 +7053,7 @@
           <p:cNvPr id="6" name="">
             <a:extLst xmlns:a="http://schemas.openxmlformats.org/drawingml/2006/main">
               <a:ext uri="{FF2B5EF4-FFF2-40B4-BE49-F238E27FC236}">
-                <a16:creationId xmlns:a16="http://schemas.microsoft.com/office/drawing/2014/main" id="{59CEF5E3-5FFF-430C-822D-A74FF1B93CD7}"/>
+                <a16:creationId xmlns:a16="http://schemas.microsoft.com/office/drawing/2014/main" id="{01737853-9AA8-4C86-9DDB-7C8727D354E0}"/>
               </a:ext>
             </a:extLst>
           </p:cNvPr>
@@ -7110,7 +7110,7 @@
           <p:cNvPr id="7" name="">
             <a:extLst xmlns:a="http://schemas.openxmlformats.org/drawingml/2006/main">
               <a:ext uri="{FF2B5EF4-FFF2-40B4-BE49-F238E27FC236}">
-                <a16:creationId xmlns:a16="http://schemas.microsoft.com/office/drawing/2014/main" id="{958814CE-51F2-4870-83C7-08219AA68178}"/>
+                <a16:creationId xmlns:a16="http://schemas.microsoft.com/office/drawing/2014/main" id="{A5FD7562-A711-4ADA-A6FF-A1A8A1DAADCE}"/>
               </a:ext>
             </a:extLst>
           </p:cNvPr>
@@ -7142,7 +7142,7 @@
           <p:cNvPr id="8" name="">
             <a:extLst xmlns:a="http://schemas.openxmlformats.org/drawingml/2006/main">
               <a:ext uri="{FF2B5EF4-FFF2-40B4-BE49-F238E27FC236}">
-                <a16:creationId xmlns:a16="http://schemas.microsoft.com/office/drawing/2014/main" id="{863D816A-8E2D-47D0-B542-5267C270170B}"/>
+                <a16:creationId xmlns:a16="http://schemas.microsoft.com/office/drawing/2014/main" id="{83A8E639-96EE-4E12-9C49-DA00CF332867}"/>
               </a:ext>
             </a:extLst>
           </p:cNvPr>
@@ -7199,7 +7199,7 @@
           <p:cNvPr id="9" name="">
             <a:extLst xmlns:a="http://schemas.openxmlformats.org/drawingml/2006/main">
               <a:ext uri="{FF2B5EF4-FFF2-40B4-BE49-F238E27FC236}">
-                <a16:creationId xmlns:a16="http://schemas.microsoft.com/office/drawing/2014/main" id="{0651AAE6-A783-44E5-93A6-B8465ED7A35C}"/>
+                <a16:creationId xmlns:a16="http://schemas.microsoft.com/office/drawing/2014/main" id="{6469D64E-F071-4318-8E4B-4F8D2FCD8CA3}"/>
               </a:ext>
             </a:extLst>
           </p:cNvPr>
@@ -7256,7 +7256,7 @@
           <p:cNvPr id="10" name="">
             <a:extLst xmlns:a="http://schemas.openxmlformats.org/drawingml/2006/main">
               <a:ext uri="{FF2B5EF4-FFF2-40B4-BE49-F238E27FC236}">
-                <a16:creationId xmlns:a16="http://schemas.microsoft.com/office/drawing/2014/main" id="{48A4C7EB-7A8E-4F95-A92E-80C08170A0B2}"/>
+                <a16:creationId xmlns:a16="http://schemas.microsoft.com/office/drawing/2014/main" id="{36B4A655-B36A-42DE-8681-E834F2282310}"/>
               </a:ext>
             </a:extLst>
           </p:cNvPr>
@@ -7313,7 +7313,7 @@
           <p:cNvPr id="11" name="">
             <a:extLst xmlns:a="http://schemas.openxmlformats.org/drawingml/2006/main">
               <a:ext uri="{FF2B5EF4-FFF2-40B4-BE49-F238E27FC236}">
-                <a16:creationId xmlns:a16="http://schemas.microsoft.com/office/drawing/2014/main" id="{9FDF1C8C-04FC-4AB4-A516-51B61E9E7126}"/>
+                <a16:creationId xmlns:a16="http://schemas.microsoft.com/office/drawing/2014/main" id="{8ED33893-C9FD-474C-9BE1-DD1F8CEEB2D5}"/>
               </a:ext>
             </a:extLst>
           </p:cNvPr>
@@ -7345,7 +7345,7 @@
           <p:cNvPr id="12" name="">
             <a:extLst xmlns:a="http://schemas.openxmlformats.org/drawingml/2006/main">
               <a:ext uri="{FF2B5EF4-FFF2-40B4-BE49-F238E27FC236}">
-                <a16:creationId xmlns:a16="http://schemas.microsoft.com/office/drawing/2014/main" id="{50A647F3-DCE5-46D9-AEA4-F5E2E1668433}"/>
+                <a16:creationId xmlns:a16="http://schemas.microsoft.com/office/drawing/2014/main" id="{828F9FB8-D4DC-442B-9092-E06A22A6F89C}"/>
               </a:ext>
             </a:extLst>
           </p:cNvPr>
@@ -7402,7 +7402,7 @@
           <p:cNvPr id="13" name="">
             <a:extLst xmlns:a="http://schemas.openxmlformats.org/drawingml/2006/main">
               <a:ext uri="{FF2B5EF4-FFF2-40B4-BE49-F238E27FC236}">
-                <a16:creationId xmlns:a16="http://schemas.microsoft.com/office/drawing/2014/main" id="{DB6D30DC-B07D-4173-AEBB-C3B5A158E2FA}"/>
+                <a16:creationId xmlns:a16="http://schemas.microsoft.com/office/drawing/2014/main" id="{01A10CF3-7A56-4308-AB65-772954CBE119}"/>
               </a:ext>
             </a:extLst>
           </p:cNvPr>
@@ -7459,7 +7459,7 @@
           <p:cNvPr id="14" name="">
             <a:extLst xmlns:a="http://schemas.openxmlformats.org/drawingml/2006/main">
               <a:ext uri="{FF2B5EF4-FFF2-40B4-BE49-F238E27FC236}">
-                <a16:creationId xmlns:a16="http://schemas.microsoft.com/office/drawing/2014/main" id="{6A6D373B-01A5-43D4-8CC9-80752EB49FD8}"/>
+                <a16:creationId xmlns:a16="http://schemas.microsoft.com/office/drawing/2014/main" id="{D20CA971-040D-4393-9EFE-8BEB4A6548CB}"/>
               </a:ext>
             </a:extLst>
           </p:cNvPr>
@@ -7516,7 +7516,7 @@
           <p:cNvPr id="15" name="">
             <a:extLst xmlns:a="http://schemas.openxmlformats.org/drawingml/2006/main">
               <a:ext uri="{FF2B5EF4-FFF2-40B4-BE49-F238E27FC236}">
-                <a16:creationId xmlns:a16="http://schemas.microsoft.com/office/drawing/2014/main" id="{E1E62360-FCF1-4992-B31D-7C7C0C12C516}"/>
+                <a16:creationId xmlns:a16="http://schemas.microsoft.com/office/drawing/2014/main" id="{BE314A56-DED3-43BD-B500-BB8DC3FD76E3}"/>
               </a:ext>
             </a:extLst>
           </p:cNvPr>
@@ -7571,7 +7571,7 @@
     </p:spTree>
     <p:extLst>
       <p:ext uri="{BB962C8B-B14F-4D97-AF65-F5344CB8AC3E}">
-        <p14:creationId xmlns:p14="http://schemas.microsoft.com/office/powerpoint/2010/main" val="547810144"/>
+        <p14:creationId xmlns:p14="http://schemas.microsoft.com/office/powerpoint/2010/main" val="786680521"/>
       </p:ext>
     </p:extLst>
   </p:cSld>
@@ -7769,10 +7769,10 @@
       </p:grpSpPr>
       <p:sp>
         <p:nvSpPr>
-          <p:cNvPr id="23" name="">
-            <a:extLst xmlns:a="http://schemas.openxmlformats.org/drawingml/2006/main">
-              <a:ext uri="{FF2B5EF4-FFF2-40B4-BE49-F238E27FC236}">
-                <a16:creationId xmlns:a16="http://schemas.microsoft.com/office/drawing/2014/main" id="{BAC581EB-D066-42DE-BC45-41C221CD0485}"/>
+          <p:cNvPr id="26" name="">
+            <a:extLst xmlns:a="http://schemas.openxmlformats.org/drawingml/2006/main">
+              <a:ext uri="{FF2B5EF4-FFF2-40B4-BE49-F238E27FC236}">
+                <a16:creationId xmlns:a16="http://schemas.microsoft.com/office/drawing/2014/main" id="{35AFE903-6579-45E3-AB58-EBC596489D1F}"/>
               </a:ext>
             </a:extLst>
           </p:cNvPr>
@@ -7804,7 +7804,7 @@
           <p:cNvPr id="2" name="">
             <a:extLst xmlns:a="http://schemas.openxmlformats.org/drawingml/2006/main">
               <a:ext uri="{FF2B5EF4-FFF2-40B4-BE49-F238E27FC236}">
-                <a16:creationId xmlns:a16="http://schemas.microsoft.com/office/drawing/2014/main" id="{86FA5B76-5BD8-4010-925A-3217B541CF31}"/>
+                <a16:creationId xmlns:a16="http://schemas.microsoft.com/office/drawing/2014/main" id="{3C5A2F3C-5091-473E-BF98-C178E86F1495}"/>
               </a:ext>
             </a:extLst>
           </p:cNvPr>
@@ -7861,7 +7861,7 @@
           <p:cNvPr id="3" name="">
             <a:extLst xmlns:a="http://schemas.openxmlformats.org/drawingml/2006/main">
               <a:ext uri="{FF2B5EF4-FFF2-40B4-BE49-F238E27FC236}">
-                <a16:creationId xmlns:a16="http://schemas.microsoft.com/office/drawing/2014/main" id="{F8789E32-44D9-466E-BD9D-534B5C8B11A5}"/>
+                <a16:creationId xmlns:a16="http://schemas.microsoft.com/office/drawing/2014/main" id="{0A809080-1C80-403C-A232-763F03656661}"/>
               </a:ext>
             </a:extLst>
           </p:cNvPr>
@@ -7893,7 +7893,7 @@
           <p:cNvPr id="4" name="">
             <a:extLst xmlns:a="http://schemas.openxmlformats.org/drawingml/2006/main">
               <a:ext uri="{FF2B5EF4-FFF2-40B4-BE49-F238E27FC236}">
-                <a16:creationId xmlns:a16="http://schemas.microsoft.com/office/drawing/2014/main" id="{B9845DBB-5FCC-4DB7-BA13-989A64FFF095}"/>
+                <a16:creationId xmlns:a16="http://schemas.microsoft.com/office/drawing/2014/main" id="{DA0B0598-F7BC-4E1E-B9C7-E46A371C779B}"/>
               </a:ext>
             </a:extLst>
           </p:cNvPr>
@@ -7950,7 +7950,7 @@
           <p:cNvPr id="5" name="">
             <a:extLst xmlns:a="http://schemas.openxmlformats.org/drawingml/2006/main">
               <a:ext uri="{FF2B5EF4-FFF2-40B4-BE49-F238E27FC236}">
-                <a16:creationId xmlns:a16="http://schemas.microsoft.com/office/drawing/2014/main" id="{81D1A977-9198-4BBA-B7B2-A7AD9D6F59F1}"/>
+                <a16:creationId xmlns:a16="http://schemas.microsoft.com/office/drawing/2014/main" id="{6F12EA2D-362A-45A1-B470-B4F94CCDDCE6}"/>
               </a:ext>
             </a:extLst>
           </p:cNvPr>
@@ -8007,7 +8007,7 @@
           <p:cNvPr id="6" name="">
             <a:extLst xmlns:a="http://schemas.openxmlformats.org/drawingml/2006/main">
               <a:ext uri="{FF2B5EF4-FFF2-40B4-BE49-F238E27FC236}">
-                <a16:creationId xmlns:a16="http://schemas.microsoft.com/office/drawing/2014/main" id="{695AE009-2639-4633-8FF6-A1DFFA77D3E2}"/>
+                <a16:creationId xmlns:a16="http://schemas.microsoft.com/office/drawing/2014/main" id="{784E5CB9-AE2F-426D-8221-7C1EACE8F4B5}"/>
               </a:ext>
             </a:extLst>
           </p:cNvPr>
@@ -8064,7 +8064,7 @@
           <p:cNvPr id="7" name="">
             <a:extLst xmlns:a="http://schemas.openxmlformats.org/drawingml/2006/main">
               <a:ext uri="{FF2B5EF4-FFF2-40B4-BE49-F238E27FC236}">
-                <a16:creationId xmlns:a16="http://schemas.microsoft.com/office/drawing/2014/main" id="{424DBE29-C62A-479E-8FE2-1C7CA1FCFE69}"/>
+                <a16:creationId xmlns:a16="http://schemas.microsoft.com/office/drawing/2014/main" id="{052E981E-0DC6-40FB-883F-EB6C10C46317}"/>
               </a:ext>
             </a:extLst>
           </p:cNvPr>
@@ -8096,7 +8096,7 @@
           <p:cNvPr id="8" name="">
             <a:extLst xmlns:a="http://schemas.openxmlformats.org/drawingml/2006/main">
               <a:ext uri="{FF2B5EF4-FFF2-40B4-BE49-F238E27FC236}">
-                <a16:creationId xmlns:a16="http://schemas.microsoft.com/office/drawing/2014/main" id="{F4FC0741-AD01-4050-8219-28BBEA3BCBE9}"/>
+                <a16:creationId xmlns:a16="http://schemas.microsoft.com/office/drawing/2014/main" id="{9879CDA8-BAA2-4D0C-A942-08D83CD36A0A}"/>
               </a:ext>
             </a:extLst>
           </p:cNvPr>
@@ -8153,7 +8153,7 @@
           <p:cNvPr id="9" name="">
             <a:extLst xmlns:a="http://schemas.openxmlformats.org/drawingml/2006/main">
               <a:ext uri="{FF2B5EF4-FFF2-40B4-BE49-F238E27FC236}">
-                <a16:creationId xmlns:a16="http://schemas.microsoft.com/office/drawing/2014/main" id="{858699B3-972D-4508-847F-96A5AC5FF5C8}"/>
+                <a16:creationId xmlns:a16="http://schemas.microsoft.com/office/drawing/2014/main" id="{DD5CD1C3-5C59-409D-A3E3-F6000FDBC9E9}"/>
               </a:ext>
             </a:extLst>
           </p:cNvPr>
@@ -8210,19 +8210,19 @@
           <p:cNvPr id="10" name="">
             <a:extLst xmlns:a="http://schemas.openxmlformats.org/drawingml/2006/main">
               <a:ext uri="{FF2B5EF4-FFF2-40B4-BE49-F238E27FC236}">
-                <a16:creationId xmlns:a16="http://schemas.microsoft.com/office/drawing/2014/main" id="{C9B53ACF-0304-4884-AF95-CACB1511BF5D}"/>
-              </a:ext>
-            </a:extLst>
-          </p:cNvPr>
-          <p:cNvSpPr>
-            <a:spLocks xmlns:a="http://schemas.openxmlformats.org/drawingml/2006/main" noGrp="1"/>
-          </p:cNvSpPr>
-          <p:nvPr/>
-        </p:nvSpPr>
-        <p:spPr>
-          <a:xfrm xmlns:a="http://schemas.openxmlformats.org/drawingml/2006/main">
-            <a:off x="914400" y="1257300"/>
-            <a:ext cx="10363200" cy="781050"/>
+                <a16:creationId xmlns:a16="http://schemas.microsoft.com/office/drawing/2014/main" id="{23898659-318F-430D-8FF0-9C9DF0DE3F18}"/>
+              </a:ext>
+            </a:extLst>
+          </p:cNvPr>
+          <p:cNvSpPr>
+            <a:spLocks xmlns:a="http://schemas.openxmlformats.org/drawingml/2006/main" noGrp="1"/>
+          </p:cNvSpPr>
+          <p:nvPr/>
+        </p:nvSpPr>
+        <p:spPr>
+          <a:xfrm xmlns:a="http://schemas.openxmlformats.org/drawingml/2006/main">
+            <a:off x="857250" y="1219200"/>
+            <a:ext cx="10477500" cy="742950"/>
           </a:xfrm>
           <a:prstGeom xmlns:a="http://schemas.openxmlformats.org/drawingml/2006/main" prst="rect">
             <a:avLst/>
@@ -8239,7 +8239,7 @@
           <a:lstStyle xmlns:a="http://schemas.openxmlformats.org/drawingml/2006/main"/>
           <a:p xmlns:a="http://schemas.openxmlformats.org/drawingml/2006/main">
             <a:pPr algn="ctr">
-              <a:defRPr sz="2175" b="1">
+              <a:defRPr sz="2100" b="1">
                 <a:solidFill>
                   <a:srgbClr val="17253A"/>
                 </a:solidFill>
@@ -8249,7 +8249,7 @@
               </a:defRPr>
             </a:pPr>
             <a:r>
-              <a:rPr sz="2175" b="1">
+              <a:rPr sz="2100" b="1">
                 <a:solidFill>
                   <a:srgbClr val="17253A"/>
                 </a:solidFill>
@@ -8267,28 +8267,30 @@
           <p:cNvPr id="11" name="">
             <a:extLst xmlns:a="http://schemas.openxmlformats.org/drawingml/2006/main">
               <a:ext uri="{FF2B5EF4-FFF2-40B4-BE49-F238E27FC236}">
-                <a16:creationId xmlns:a16="http://schemas.microsoft.com/office/drawing/2014/main" id="{5C82A267-80EA-4353-B52D-623E6F81D001}"/>
-              </a:ext>
-            </a:extLst>
-          </p:cNvPr>
-          <p:cNvSpPr>
-            <a:spLocks xmlns:a="http://schemas.openxmlformats.org/drawingml/2006/main" noGrp="1"/>
-          </p:cNvSpPr>
-          <p:nvPr/>
-        </p:nvSpPr>
-        <p:spPr>
-          <a:xfrm xmlns:a="http://schemas.openxmlformats.org/drawingml/2006/main">
-            <a:off x="1000125" y="2247900"/>
-            <a:ext cx="476250" cy="476250"/>
-          </a:xfrm>
-          <a:prstGeom xmlns:a="http://schemas.openxmlformats.org/drawingml/2006/main" prst="ellipse">
+                <a16:creationId xmlns:a16="http://schemas.microsoft.com/office/drawing/2014/main" id="{21FC4BAA-6DC3-4E50-89B2-5DD2926C04AE}"/>
+              </a:ext>
+            </a:extLst>
+          </p:cNvPr>
+          <p:cNvSpPr>
+            <a:spLocks xmlns:a="http://schemas.openxmlformats.org/drawingml/2006/main" noGrp="1"/>
+          </p:cNvSpPr>
+          <p:nvPr/>
+        </p:nvSpPr>
+        <p:spPr>
+          <a:xfrm xmlns:a="http://schemas.openxmlformats.org/drawingml/2006/main">
+            <a:off x="971550" y="2124075"/>
+            <a:ext cx="38100" cy="3524250"/>
+          </a:xfrm>
+          <a:prstGeom xmlns:a="http://schemas.openxmlformats.org/drawingml/2006/main" prst="rect">
             <a:avLst/>
           </a:prstGeom>
           <a:solidFill xmlns:a="http://schemas.openxmlformats.org/drawingml/2006/main">
-            <a:srgbClr val="18324A"/>
+            <a:srgbClr val="2C6E73"/>
           </a:solidFill>
           <a:ln xmlns:a="http://schemas.openxmlformats.org/drawingml/2006/main" w="0">
-            <a:noFill/>
+            <a:solidFill>
+              <a:srgbClr val="2C6E73"/>
+            </a:solidFill>
           </a:ln>
         </p:spPr>
       </p:sp>
@@ -8297,19 +8299,19 @@
           <p:cNvPr id="12" name="">
             <a:extLst xmlns:a="http://schemas.openxmlformats.org/drawingml/2006/main">
               <a:ext uri="{FF2B5EF4-FFF2-40B4-BE49-F238E27FC236}">
-                <a16:creationId xmlns:a16="http://schemas.microsoft.com/office/drawing/2014/main" id="{E419FC5F-8B04-4D61-98DF-E303FB460380}"/>
-              </a:ext>
-            </a:extLst>
-          </p:cNvPr>
-          <p:cNvSpPr>
-            <a:spLocks xmlns:a="http://schemas.openxmlformats.org/drawingml/2006/main" noGrp="1"/>
-          </p:cNvSpPr>
-          <p:nvPr/>
-        </p:nvSpPr>
-        <p:spPr>
-          <a:xfrm xmlns:a="http://schemas.openxmlformats.org/drawingml/2006/main">
-            <a:off x="1000125" y="2276475"/>
-            <a:ext cx="476250" cy="419100"/>
+                <a16:creationId xmlns:a16="http://schemas.microsoft.com/office/drawing/2014/main" id="{D088D855-1FA4-4152-872E-3C34999E87BB}"/>
+              </a:ext>
+            </a:extLst>
+          </p:cNvPr>
+          <p:cNvSpPr>
+            <a:spLocks xmlns:a="http://schemas.openxmlformats.org/drawingml/2006/main" noGrp="1"/>
+          </p:cNvSpPr>
+          <p:nvPr/>
+        </p:nvSpPr>
+        <p:spPr>
+          <a:xfrm xmlns:a="http://schemas.openxmlformats.org/drawingml/2006/main">
+            <a:off x="1162050" y="2200275"/>
+            <a:ext cx="400050" cy="400050"/>
           </a:xfrm>
           <a:prstGeom xmlns:a="http://schemas.openxmlformats.org/drawingml/2006/main" prst="rect">
             <a:avLst/>
@@ -8326,9 +8328,9 @@
           <a:lstStyle xmlns:a="http://schemas.openxmlformats.org/drawingml/2006/main"/>
           <a:p xmlns:a="http://schemas.openxmlformats.org/drawingml/2006/main">
             <a:pPr algn="ctr">
-              <a:defRPr sz="1350" b="1">
-                <a:solidFill>
-                  <a:srgbClr val="FFFFFF"/>
+              <a:defRPr sz="1125" b="1">
+                <a:solidFill>
+                  <a:srgbClr val="2C6E73"/>
                 </a:solidFill>
                 <a:latin typeface="Arial"/>
                 <a:ea typeface="Arial"/>
@@ -8336,9 +8338,9 @@
               </a:defRPr>
             </a:pPr>
             <a:r>
-              <a:rPr sz="1350" b="1">
-                <a:solidFill>
-                  <a:srgbClr val="FFFFFF"/>
+              <a:rPr sz="1125" b="1">
+                <a:solidFill>
+                  <a:srgbClr val="2C6E73"/>
                 </a:solidFill>
                 <a:latin typeface="Arial"/>
                 <a:ea typeface="Arial"/>
@@ -8354,19 +8356,19 @@
           <p:cNvPr id="13" name="">
             <a:extLst xmlns:a="http://schemas.openxmlformats.org/drawingml/2006/main">
               <a:ext uri="{FF2B5EF4-FFF2-40B4-BE49-F238E27FC236}">
-                <a16:creationId xmlns:a16="http://schemas.microsoft.com/office/drawing/2014/main" id="{3D072E3B-5054-4FCE-9DDC-A4EA6E5FEBEF}"/>
-              </a:ext>
-            </a:extLst>
-          </p:cNvPr>
-          <p:cNvSpPr>
-            <a:spLocks xmlns:a="http://schemas.openxmlformats.org/drawingml/2006/main" noGrp="1"/>
-          </p:cNvSpPr>
-          <p:nvPr/>
-        </p:nvSpPr>
-        <p:spPr>
-          <a:xfrm xmlns:a="http://schemas.openxmlformats.org/drawingml/2006/main">
-            <a:off x="1714500" y="2181225"/>
-            <a:ext cx="9429750" cy="609600"/>
+                <a16:creationId xmlns:a16="http://schemas.microsoft.com/office/drawing/2014/main" id="{FE93F085-2ABC-41C2-90DC-373A9B176981}"/>
+              </a:ext>
+            </a:extLst>
+          </p:cNvPr>
+          <p:cNvSpPr>
+            <a:spLocks xmlns:a="http://schemas.openxmlformats.org/drawingml/2006/main" noGrp="1"/>
+          </p:cNvSpPr>
+          <p:nvPr/>
+        </p:nvSpPr>
+        <p:spPr>
+          <a:xfrm xmlns:a="http://schemas.openxmlformats.org/drawingml/2006/main">
+            <a:off x="1714500" y="2114550"/>
+            <a:ext cx="9525000" cy="638175"/>
           </a:xfrm>
           <a:prstGeom xmlns:a="http://schemas.openxmlformats.org/drawingml/2006/main" prst="rect">
             <a:avLst/>
@@ -8383,7 +8385,7 @@
           <a:lstStyle xmlns:a="http://schemas.openxmlformats.org/drawingml/2006/main"/>
           <a:p xmlns:a="http://schemas.openxmlformats.org/drawingml/2006/main">
             <a:pPr algn="l">
-              <a:defRPr sz="1500" b="0">
+              <a:defRPr sz="1575" b="0">
                 <a:solidFill>
                   <a:srgbClr val="17253A"/>
                 </a:solidFill>
@@ -8393,7 +8395,7 @@
               </a:defRPr>
             </a:pPr>
             <a:r>
-              <a:rPr sz="1500" b="0">
+              <a:rPr sz="1575" b="0">
                 <a:solidFill>
                   <a:srgbClr val="17253A"/>
                 </a:solidFill>
@@ -8401,7 +8403,7 @@
                 <a:ea typeface="Arial"/>
                 <a:cs typeface="Arial"/>
               </a:rPr>
-              <a:t>Identify the structure: Identify useful common factors or a common denominator.</a:t>
+              <a:t>7/12 and 5/8</a:t>
             </a:r>
           </a:p>
         </p:txBody>
@@ -8411,28 +8413,30 @@
           <p:cNvPr id="14" name="">
             <a:extLst xmlns:a="http://schemas.openxmlformats.org/drawingml/2006/main">
               <a:ext uri="{FF2B5EF4-FFF2-40B4-BE49-F238E27FC236}">
-                <a16:creationId xmlns:a16="http://schemas.microsoft.com/office/drawing/2014/main" id="{38093141-50B3-4B6A-98CA-C678E2C46E7D}"/>
-              </a:ext>
-            </a:extLst>
-          </p:cNvPr>
-          <p:cNvSpPr>
-            <a:spLocks xmlns:a="http://schemas.openxmlformats.org/drawingml/2006/main" noGrp="1"/>
-          </p:cNvSpPr>
-          <p:nvPr/>
-        </p:nvSpPr>
-        <p:spPr>
-          <a:xfrm xmlns:a="http://schemas.openxmlformats.org/drawingml/2006/main">
-            <a:off x="1000125" y="2990850"/>
-            <a:ext cx="476250" cy="476250"/>
-          </a:xfrm>
-          <a:prstGeom xmlns:a="http://schemas.openxmlformats.org/drawingml/2006/main" prst="ellipse">
+                <a16:creationId xmlns:a16="http://schemas.microsoft.com/office/drawing/2014/main" id="{14498ED3-4BA5-4197-A484-327055D675B6}"/>
+              </a:ext>
+            </a:extLst>
+          </p:cNvPr>
+          <p:cNvSpPr>
+            <a:spLocks xmlns:a="http://schemas.openxmlformats.org/drawingml/2006/main" noGrp="1"/>
+          </p:cNvSpPr>
+          <p:nvPr/>
+        </p:nvSpPr>
+        <p:spPr>
+          <a:xfrm xmlns:a="http://schemas.openxmlformats.org/drawingml/2006/main">
+            <a:off x="1714500" y="2771775"/>
+            <a:ext cx="9334500" cy="9525"/>
+          </a:xfrm>
+          <a:prstGeom xmlns:a="http://schemas.openxmlformats.org/drawingml/2006/main" prst="rect">
             <a:avLst/>
           </a:prstGeom>
           <a:solidFill xmlns:a="http://schemas.openxmlformats.org/drawingml/2006/main">
-            <a:srgbClr val="2C6E73"/>
+            <a:srgbClr val="D9E0E6"/>
           </a:solidFill>
           <a:ln xmlns:a="http://schemas.openxmlformats.org/drawingml/2006/main" w="0">
-            <a:noFill/>
+            <a:solidFill>
+              <a:srgbClr val="D9E0E6"/>
+            </a:solidFill>
           </a:ln>
         </p:spPr>
       </p:sp>
@@ -8441,19 +8445,19 @@
           <p:cNvPr id="15" name="">
             <a:extLst xmlns:a="http://schemas.openxmlformats.org/drawingml/2006/main">
               <a:ext uri="{FF2B5EF4-FFF2-40B4-BE49-F238E27FC236}">
-                <a16:creationId xmlns:a16="http://schemas.microsoft.com/office/drawing/2014/main" id="{CA45F0F2-FF72-4685-9DA3-B13323F97C85}"/>
-              </a:ext>
-            </a:extLst>
-          </p:cNvPr>
-          <p:cNvSpPr>
-            <a:spLocks xmlns:a="http://schemas.openxmlformats.org/drawingml/2006/main" noGrp="1"/>
-          </p:cNvSpPr>
-          <p:nvPr/>
-        </p:nvSpPr>
-        <p:spPr>
-          <a:xfrm xmlns:a="http://schemas.openxmlformats.org/drawingml/2006/main">
-            <a:off x="1000125" y="3019425"/>
-            <a:ext cx="476250" cy="419100"/>
+                <a16:creationId xmlns:a16="http://schemas.microsoft.com/office/drawing/2014/main" id="{6FEB1880-6118-4C2C-9850-CF6D834F1CFF}"/>
+              </a:ext>
+            </a:extLst>
+          </p:cNvPr>
+          <p:cNvSpPr>
+            <a:spLocks xmlns:a="http://schemas.openxmlformats.org/drawingml/2006/main" noGrp="1"/>
+          </p:cNvSpPr>
+          <p:nvPr/>
+        </p:nvSpPr>
+        <p:spPr>
+          <a:xfrm xmlns:a="http://schemas.openxmlformats.org/drawingml/2006/main">
+            <a:off x="1162050" y="2905125"/>
+            <a:ext cx="400050" cy="400050"/>
           </a:xfrm>
           <a:prstGeom xmlns:a="http://schemas.openxmlformats.org/drawingml/2006/main" prst="rect">
             <a:avLst/>
@@ -8470,9 +8474,9 @@
           <a:lstStyle xmlns:a="http://schemas.openxmlformats.org/drawingml/2006/main"/>
           <a:p xmlns:a="http://schemas.openxmlformats.org/drawingml/2006/main">
             <a:pPr algn="ctr">
-              <a:defRPr sz="1350" b="1">
-                <a:solidFill>
-                  <a:srgbClr val="FFFFFF"/>
+              <a:defRPr sz="1125" b="1">
+                <a:solidFill>
+                  <a:srgbClr val="2C6E73"/>
                 </a:solidFill>
                 <a:latin typeface="Arial"/>
                 <a:ea typeface="Arial"/>
@@ -8480,9 +8484,9 @@
               </a:defRPr>
             </a:pPr>
             <a:r>
-              <a:rPr sz="1350" b="1">
-                <a:solidFill>
-                  <a:srgbClr val="FFFFFF"/>
+              <a:rPr sz="1125" b="1">
+                <a:solidFill>
+                  <a:srgbClr val="2C6E73"/>
                 </a:solidFill>
                 <a:latin typeface="Arial"/>
                 <a:ea typeface="Arial"/>
@@ -8498,19 +8502,19 @@
           <p:cNvPr id="16" name="">
             <a:extLst xmlns:a="http://schemas.openxmlformats.org/drawingml/2006/main">
               <a:ext uri="{FF2B5EF4-FFF2-40B4-BE49-F238E27FC236}">
-                <a16:creationId xmlns:a16="http://schemas.microsoft.com/office/drawing/2014/main" id="{6DE285C2-715B-4D92-BF2C-5CC73CFCD4C3}"/>
-              </a:ext>
-            </a:extLst>
-          </p:cNvPr>
-          <p:cNvSpPr>
-            <a:spLocks xmlns:a="http://schemas.openxmlformats.org/drawingml/2006/main" noGrp="1"/>
-          </p:cNvSpPr>
-          <p:nvPr/>
-        </p:nvSpPr>
-        <p:spPr>
-          <a:xfrm xmlns:a="http://schemas.openxmlformats.org/drawingml/2006/main">
-            <a:off x="1714500" y="2924175"/>
-            <a:ext cx="9429750" cy="609600"/>
+                <a16:creationId xmlns:a16="http://schemas.microsoft.com/office/drawing/2014/main" id="{484048EE-25C5-4B1A-87BF-491CA54C2CE1}"/>
+              </a:ext>
+            </a:extLst>
+          </p:cNvPr>
+          <p:cNvSpPr>
+            <a:spLocks xmlns:a="http://schemas.openxmlformats.org/drawingml/2006/main" noGrp="1"/>
+          </p:cNvSpPr>
+          <p:nvPr/>
+        </p:nvSpPr>
+        <p:spPr>
+          <a:xfrm xmlns:a="http://schemas.openxmlformats.org/drawingml/2006/main">
+            <a:off x="1714500" y="2819400"/>
+            <a:ext cx="9525000" cy="638175"/>
           </a:xfrm>
           <a:prstGeom xmlns:a="http://schemas.openxmlformats.org/drawingml/2006/main" prst="rect">
             <a:avLst/>
@@ -8527,7 +8531,7 @@
           <a:lstStyle xmlns:a="http://schemas.openxmlformats.org/drawingml/2006/main"/>
           <a:p xmlns:a="http://schemas.openxmlformats.org/drawingml/2006/main">
             <a:pPr algn="l">
-              <a:defRPr sz="1500" b="0">
+              <a:defRPr sz="1575" b="0">
                 <a:solidFill>
                   <a:srgbClr val="17253A"/>
                 </a:solidFill>
@@ -8537,7 +8541,7 @@
               </a:defRPr>
             </a:pPr>
             <a:r>
-              <a:rPr sz="1500" b="0">
+              <a:rPr sz="1575" b="0">
                 <a:solidFill>
                   <a:srgbClr val="17253A"/>
                 </a:solidFill>
@@ -8545,7 +8549,7 @@
                 <a:ea typeface="Arial"/>
                 <a:cs typeface="Arial"/>
               </a:rPr>
-              <a:t>Set up the method: Convert or simplify without changing the fraction's value.</a:t>
+              <a:t>Common denominator = 24</a:t>
             </a:r>
           </a:p>
         </p:txBody>
@@ -8555,28 +8559,30 @@
           <p:cNvPr id="17" name="">
             <a:extLst xmlns:a="http://schemas.openxmlformats.org/drawingml/2006/main">
               <a:ext uri="{FF2B5EF4-FFF2-40B4-BE49-F238E27FC236}">
-                <a16:creationId xmlns:a16="http://schemas.microsoft.com/office/drawing/2014/main" id="{6724CFFC-5DC0-4674-89AF-C057BE812267}"/>
-              </a:ext>
-            </a:extLst>
-          </p:cNvPr>
-          <p:cNvSpPr>
-            <a:spLocks xmlns:a="http://schemas.openxmlformats.org/drawingml/2006/main" noGrp="1"/>
-          </p:cNvSpPr>
-          <p:nvPr/>
-        </p:nvSpPr>
-        <p:spPr>
-          <a:xfrm xmlns:a="http://schemas.openxmlformats.org/drawingml/2006/main">
-            <a:off x="1000125" y="3733800"/>
-            <a:ext cx="476250" cy="476250"/>
-          </a:xfrm>
-          <a:prstGeom xmlns:a="http://schemas.openxmlformats.org/drawingml/2006/main" prst="ellipse">
+                <a16:creationId xmlns:a16="http://schemas.microsoft.com/office/drawing/2014/main" id="{22066D93-62FA-45B5-9640-212F3D546636}"/>
+              </a:ext>
+            </a:extLst>
+          </p:cNvPr>
+          <p:cNvSpPr>
+            <a:spLocks xmlns:a="http://schemas.openxmlformats.org/drawingml/2006/main" noGrp="1"/>
+          </p:cNvSpPr>
+          <p:nvPr/>
+        </p:nvSpPr>
+        <p:spPr>
+          <a:xfrm xmlns:a="http://schemas.openxmlformats.org/drawingml/2006/main">
+            <a:off x="1714500" y="3476625"/>
+            <a:ext cx="9334500" cy="9525"/>
+          </a:xfrm>
+          <a:prstGeom xmlns:a="http://schemas.openxmlformats.org/drawingml/2006/main" prst="rect">
             <a:avLst/>
           </a:prstGeom>
           <a:solidFill xmlns:a="http://schemas.openxmlformats.org/drawingml/2006/main">
-            <a:srgbClr val="2C6E73"/>
+            <a:srgbClr val="D9E0E6"/>
           </a:solidFill>
           <a:ln xmlns:a="http://schemas.openxmlformats.org/drawingml/2006/main" w="0">
-            <a:noFill/>
+            <a:solidFill>
+              <a:srgbClr val="D9E0E6"/>
+            </a:solidFill>
           </a:ln>
         </p:spPr>
       </p:sp>
@@ -8585,19 +8591,19 @@
           <p:cNvPr id="18" name="">
             <a:extLst xmlns:a="http://schemas.openxmlformats.org/drawingml/2006/main">
               <a:ext uri="{FF2B5EF4-FFF2-40B4-BE49-F238E27FC236}">
-                <a16:creationId xmlns:a16="http://schemas.microsoft.com/office/drawing/2014/main" id="{F966C22E-D899-4B53-A817-B1F8DD6AB42F}"/>
-              </a:ext>
-            </a:extLst>
-          </p:cNvPr>
-          <p:cNvSpPr>
-            <a:spLocks xmlns:a="http://schemas.openxmlformats.org/drawingml/2006/main" noGrp="1"/>
-          </p:cNvSpPr>
-          <p:nvPr/>
-        </p:nvSpPr>
-        <p:spPr>
-          <a:xfrm xmlns:a="http://schemas.openxmlformats.org/drawingml/2006/main">
-            <a:off x="1000125" y="3762375"/>
-            <a:ext cx="476250" cy="419100"/>
+                <a16:creationId xmlns:a16="http://schemas.microsoft.com/office/drawing/2014/main" id="{3E24E88A-2802-476E-B141-C4C6FC595553}"/>
+              </a:ext>
+            </a:extLst>
+          </p:cNvPr>
+          <p:cNvSpPr>
+            <a:spLocks xmlns:a="http://schemas.openxmlformats.org/drawingml/2006/main" noGrp="1"/>
+          </p:cNvSpPr>
+          <p:nvPr/>
+        </p:nvSpPr>
+        <p:spPr>
+          <a:xfrm xmlns:a="http://schemas.openxmlformats.org/drawingml/2006/main">
+            <a:off x="1162050" y="3609975"/>
+            <a:ext cx="400050" cy="400050"/>
           </a:xfrm>
           <a:prstGeom xmlns:a="http://schemas.openxmlformats.org/drawingml/2006/main" prst="rect">
             <a:avLst/>
@@ -8614,9 +8620,9 @@
           <a:lstStyle xmlns:a="http://schemas.openxmlformats.org/drawingml/2006/main"/>
           <a:p xmlns:a="http://schemas.openxmlformats.org/drawingml/2006/main">
             <a:pPr algn="ctr">
-              <a:defRPr sz="1350" b="1">
-                <a:solidFill>
-                  <a:srgbClr val="FFFFFF"/>
+              <a:defRPr sz="1125" b="1">
+                <a:solidFill>
+                  <a:srgbClr val="2C6E73"/>
                 </a:solidFill>
                 <a:latin typeface="Arial"/>
                 <a:ea typeface="Arial"/>
@@ -8624,9 +8630,9 @@
               </a:defRPr>
             </a:pPr>
             <a:r>
-              <a:rPr sz="1350" b="1">
-                <a:solidFill>
-                  <a:srgbClr val="FFFFFF"/>
+              <a:rPr sz="1125" b="1">
+                <a:solidFill>
+                  <a:srgbClr val="2C6E73"/>
                 </a:solidFill>
                 <a:latin typeface="Arial"/>
                 <a:ea typeface="Arial"/>
@@ -8642,19 +8648,19 @@
           <p:cNvPr id="19" name="">
             <a:extLst xmlns:a="http://schemas.openxmlformats.org/drawingml/2006/main">
               <a:ext uri="{FF2B5EF4-FFF2-40B4-BE49-F238E27FC236}">
-                <a16:creationId xmlns:a16="http://schemas.microsoft.com/office/drawing/2014/main" id="{C596A3C4-81CA-49F7-89D5-80A75119F520}"/>
-              </a:ext>
-            </a:extLst>
-          </p:cNvPr>
-          <p:cNvSpPr>
-            <a:spLocks xmlns:a="http://schemas.openxmlformats.org/drawingml/2006/main" noGrp="1"/>
-          </p:cNvSpPr>
-          <p:nvPr/>
-        </p:nvSpPr>
-        <p:spPr>
-          <a:xfrm xmlns:a="http://schemas.openxmlformats.org/drawingml/2006/main">
-            <a:off x="1714500" y="3667125"/>
-            <a:ext cx="9429750" cy="609600"/>
+                <a16:creationId xmlns:a16="http://schemas.microsoft.com/office/drawing/2014/main" id="{9628738A-2BD7-4EFA-89C2-2FDAA26A9F2F}"/>
+              </a:ext>
+            </a:extLst>
+          </p:cNvPr>
+          <p:cNvSpPr>
+            <a:spLocks xmlns:a="http://schemas.openxmlformats.org/drawingml/2006/main" noGrp="1"/>
+          </p:cNvSpPr>
+          <p:nvPr/>
+        </p:nvSpPr>
+        <p:spPr>
+          <a:xfrm xmlns:a="http://schemas.openxmlformats.org/drawingml/2006/main">
+            <a:off x="1714500" y="3524250"/>
+            <a:ext cx="9525000" cy="638175"/>
           </a:xfrm>
           <a:prstGeom xmlns:a="http://schemas.openxmlformats.org/drawingml/2006/main" prst="rect">
             <a:avLst/>
@@ -8671,7 +8677,7 @@
           <a:lstStyle xmlns:a="http://schemas.openxmlformats.org/drawingml/2006/main"/>
           <a:p xmlns:a="http://schemas.openxmlformats.org/drawingml/2006/main">
             <a:pPr algn="l">
-              <a:defRPr sz="1500" b="0">
+              <a:defRPr sz="1575" b="0">
                 <a:solidFill>
                   <a:srgbClr val="17253A"/>
                 </a:solidFill>
@@ -8681,7 +8687,7 @@
               </a:defRPr>
             </a:pPr>
             <a:r>
-              <a:rPr sz="1500" b="0">
+              <a:rPr sz="1575" b="0">
                 <a:solidFill>
                   <a:srgbClr val="17253A"/>
                 </a:solidFill>
@@ -8689,7 +8695,7 @@
                 <a:ea typeface="Arial"/>
                 <a:cs typeface="Arial"/>
               </a:rPr>
-              <a:t>Complete the calculation: 5/8 because 7/12 = 14/24 and 5/8 = 15/24.</a:t>
+              <a:t>7/12 = 14/24     5/8 = 15/24</a:t>
             </a:r>
           </a:p>
         </p:txBody>
@@ -8699,28 +8705,30 @@
           <p:cNvPr id="20" name="">
             <a:extLst xmlns:a="http://schemas.openxmlformats.org/drawingml/2006/main">
               <a:ext uri="{FF2B5EF4-FFF2-40B4-BE49-F238E27FC236}">
-                <a16:creationId xmlns:a16="http://schemas.microsoft.com/office/drawing/2014/main" id="{3022C515-EDF7-4D01-823A-FF8E419BBE8C}"/>
-              </a:ext>
-            </a:extLst>
-          </p:cNvPr>
-          <p:cNvSpPr>
-            <a:spLocks xmlns:a="http://schemas.openxmlformats.org/drawingml/2006/main" noGrp="1"/>
-          </p:cNvSpPr>
-          <p:nvPr/>
-        </p:nvSpPr>
-        <p:spPr>
-          <a:xfrm xmlns:a="http://schemas.openxmlformats.org/drawingml/2006/main">
-            <a:off x="1000125" y="4476750"/>
-            <a:ext cx="476250" cy="476250"/>
-          </a:xfrm>
-          <a:prstGeom xmlns:a="http://schemas.openxmlformats.org/drawingml/2006/main" prst="ellipse">
+                <a16:creationId xmlns:a16="http://schemas.microsoft.com/office/drawing/2014/main" id="{085C54D3-A9C0-46E2-A49C-54B29D1CF0A6}"/>
+              </a:ext>
+            </a:extLst>
+          </p:cNvPr>
+          <p:cNvSpPr>
+            <a:spLocks xmlns:a="http://schemas.openxmlformats.org/drawingml/2006/main" noGrp="1"/>
+          </p:cNvSpPr>
+          <p:nvPr/>
+        </p:nvSpPr>
+        <p:spPr>
+          <a:xfrm xmlns:a="http://schemas.openxmlformats.org/drawingml/2006/main">
+            <a:off x="1714500" y="4181475"/>
+            <a:ext cx="9334500" cy="9525"/>
+          </a:xfrm>
+          <a:prstGeom xmlns:a="http://schemas.openxmlformats.org/drawingml/2006/main" prst="rect">
             <a:avLst/>
           </a:prstGeom>
           <a:solidFill xmlns:a="http://schemas.openxmlformats.org/drawingml/2006/main">
-            <a:srgbClr val="2C6E73"/>
+            <a:srgbClr val="D9E0E6"/>
           </a:solidFill>
           <a:ln xmlns:a="http://schemas.openxmlformats.org/drawingml/2006/main" w="0">
-            <a:noFill/>
+            <a:solidFill>
+              <a:srgbClr val="D9E0E6"/>
+            </a:solidFill>
           </a:ln>
         </p:spPr>
       </p:sp>
@@ -8729,19 +8737,19 @@
           <p:cNvPr id="21" name="">
             <a:extLst xmlns:a="http://schemas.openxmlformats.org/drawingml/2006/main">
               <a:ext uri="{FF2B5EF4-FFF2-40B4-BE49-F238E27FC236}">
-                <a16:creationId xmlns:a16="http://schemas.microsoft.com/office/drawing/2014/main" id="{E44F4A72-40CC-47D9-BEF2-84B594C4E67F}"/>
-              </a:ext>
-            </a:extLst>
-          </p:cNvPr>
-          <p:cNvSpPr>
-            <a:spLocks xmlns:a="http://schemas.openxmlformats.org/drawingml/2006/main" noGrp="1"/>
-          </p:cNvSpPr>
-          <p:nvPr/>
-        </p:nvSpPr>
-        <p:spPr>
-          <a:xfrm xmlns:a="http://schemas.openxmlformats.org/drawingml/2006/main">
-            <a:off x="1000125" y="4505325"/>
-            <a:ext cx="476250" cy="419100"/>
+                <a16:creationId xmlns:a16="http://schemas.microsoft.com/office/drawing/2014/main" id="{A0790DE5-8E35-4783-A579-339BE29E8F9D}"/>
+              </a:ext>
+            </a:extLst>
+          </p:cNvPr>
+          <p:cNvSpPr>
+            <a:spLocks xmlns:a="http://schemas.openxmlformats.org/drawingml/2006/main" noGrp="1"/>
+          </p:cNvSpPr>
+          <p:nvPr/>
+        </p:nvSpPr>
+        <p:spPr>
+          <a:xfrm xmlns:a="http://schemas.openxmlformats.org/drawingml/2006/main">
+            <a:off x="1162050" y="4314825"/>
+            <a:ext cx="400050" cy="400050"/>
           </a:xfrm>
           <a:prstGeom xmlns:a="http://schemas.openxmlformats.org/drawingml/2006/main" prst="rect">
             <a:avLst/>
@@ -8758,9 +8766,9 @@
           <a:lstStyle xmlns:a="http://schemas.openxmlformats.org/drawingml/2006/main"/>
           <a:p xmlns:a="http://schemas.openxmlformats.org/drawingml/2006/main">
             <a:pPr algn="ctr">
-              <a:defRPr sz="1350" b="1">
-                <a:solidFill>
-                  <a:srgbClr val="FFFFFF"/>
+              <a:defRPr sz="1125" b="1">
+                <a:solidFill>
+                  <a:srgbClr val="2C6E73"/>
                 </a:solidFill>
                 <a:latin typeface="Arial"/>
                 <a:ea typeface="Arial"/>
@@ -8768,9 +8776,9 @@
               </a:defRPr>
             </a:pPr>
             <a:r>
-              <a:rPr sz="1350" b="1">
-                <a:solidFill>
-                  <a:srgbClr val="FFFFFF"/>
+              <a:rPr sz="1125" b="1">
+                <a:solidFill>
+                  <a:srgbClr val="2C6E73"/>
                 </a:solidFill>
                 <a:latin typeface="Arial"/>
                 <a:ea typeface="Arial"/>
@@ -8786,19 +8794,19 @@
           <p:cNvPr id="22" name="">
             <a:extLst xmlns:a="http://schemas.openxmlformats.org/drawingml/2006/main">
               <a:ext uri="{FF2B5EF4-FFF2-40B4-BE49-F238E27FC236}">
-                <a16:creationId xmlns:a16="http://schemas.microsoft.com/office/drawing/2014/main" id="{D7C73D90-8CE4-4B76-B864-69C5FBB56583}"/>
-              </a:ext>
-            </a:extLst>
-          </p:cNvPr>
-          <p:cNvSpPr>
-            <a:spLocks xmlns:a="http://schemas.openxmlformats.org/drawingml/2006/main" noGrp="1"/>
-          </p:cNvSpPr>
-          <p:nvPr/>
-        </p:nvSpPr>
-        <p:spPr>
-          <a:xfrm xmlns:a="http://schemas.openxmlformats.org/drawingml/2006/main">
-            <a:off x="1714500" y="4410075"/>
-            <a:ext cx="9429750" cy="609600"/>
+                <a16:creationId xmlns:a16="http://schemas.microsoft.com/office/drawing/2014/main" id="{33711030-9FF5-4FE5-A4E6-4355D5BF6685}"/>
+              </a:ext>
+            </a:extLst>
+          </p:cNvPr>
+          <p:cNvSpPr>
+            <a:spLocks xmlns:a="http://schemas.openxmlformats.org/drawingml/2006/main" noGrp="1"/>
+          </p:cNvSpPr>
+          <p:nvPr/>
+        </p:nvSpPr>
+        <p:spPr>
+          <a:xfrm xmlns:a="http://schemas.openxmlformats.org/drawingml/2006/main">
+            <a:off x="1714500" y="4229100"/>
+            <a:ext cx="9525000" cy="638175"/>
           </a:xfrm>
           <a:prstGeom xmlns:a="http://schemas.openxmlformats.org/drawingml/2006/main" prst="rect">
             <a:avLst/>
@@ -8815,9 +8823,9 @@
           <a:lstStyle xmlns:a="http://schemas.openxmlformats.org/drawingml/2006/main"/>
           <a:p xmlns:a="http://schemas.openxmlformats.org/drawingml/2006/main">
             <a:pPr algn="l">
-              <a:defRPr sz="1500" b="1">
-                <a:solidFill>
-                  <a:srgbClr val="2F785D"/>
+              <a:defRPr sz="1575" b="0">
+                <a:solidFill>
+                  <a:srgbClr val="17253A"/>
                 </a:solidFill>
                 <a:latin typeface="Arial"/>
                 <a:ea typeface="Arial"/>
@@ -8825,15 +8833,161 @@
               </a:defRPr>
             </a:pPr>
             <a:r>
-              <a:rPr sz="1500" b="1">
+              <a:rPr sz="1575" b="0">
+                <a:solidFill>
+                  <a:srgbClr val="17253A"/>
+                </a:solidFill>
+                <a:latin typeface="Arial"/>
+                <a:ea typeface="Arial"/>
+                <a:cs typeface="Arial"/>
+              </a:rPr>
+              <a:t>15/24 &gt; 14/24</a:t>
+            </a:r>
+          </a:p>
+        </p:txBody>
+      </p:sp>
+      <p:sp>
+        <p:nvSpPr>
+          <p:cNvPr id="23" name="">
+            <a:extLst xmlns:a="http://schemas.openxmlformats.org/drawingml/2006/main">
+              <a:ext uri="{FF2B5EF4-FFF2-40B4-BE49-F238E27FC236}">
+                <a16:creationId xmlns:a16="http://schemas.microsoft.com/office/drawing/2014/main" id="{3C17283A-B060-4FCC-AD0A-D834A9CC82A4}"/>
+              </a:ext>
+            </a:extLst>
+          </p:cNvPr>
+          <p:cNvSpPr>
+            <a:spLocks xmlns:a="http://schemas.openxmlformats.org/drawingml/2006/main" noGrp="1"/>
+          </p:cNvSpPr>
+          <p:nvPr/>
+        </p:nvSpPr>
+        <p:spPr>
+          <a:xfrm xmlns:a="http://schemas.openxmlformats.org/drawingml/2006/main">
+            <a:off x="1714500" y="4886325"/>
+            <a:ext cx="9334500" cy="9525"/>
+          </a:xfrm>
+          <a:prstGeom xmlns:a="http://schemas.openxmlformats.org/drawingml/2006/main" prst="rect">
+            <a:avLst/>
+          </a:prstGeom>
+          <a:solidFill xmlns:a="http://schemas.openxmlformats.org/drawingml/2006/main">
+            <a:srgbClr val="D9E0E6"/>
+          </a:solidFill>
+          <a:ln xmlns:a="http://schemas.openxmlformats.org/drawingml/2006/main" w="0">
+            <a:solidFill>
+              <a:srgbClr val="D9E0E6"/>
+            </a:solidFill>
+          </a:ln>
+        </p:spPr>
+      </p:sp>
+      <p:sp>
+        <p:nvSpPr>
+          <p:cNvPr id="24" name="">
+            <a:extLst xmlns:a="http://schemas.openxmlformats.org/drawingml/2006/main">
+              <a:ext uri="{FF2B5EF4-FFF2-40B4-BE49-F238E27FC236}">
+                <a16:creationId xmlns:a16="http://schemas.microsoft.com/office/drawing/2014/main" id="{2A092388-9569-4BDD-A5F8-979154A9C6AD}"/>
+              </a:ext>
+            </a:extLst>
+          </p:cNvPr>
+          <p:cNvSpPr>
+            <a:spLocks xmlns:a="http://schemas.openxmlformats.org/drawingml/2006/main" noGrp="1"/>
+          </p:cNvSpPr>
+          <p:nvPr/>
+        </p:nvSpPr>
+        <p:spPr>
+          <a:xfrm xmlns:a="http://schemas.openxmlformats.org/drawingml/2006/main">
+            <a:off x="1162050" y="5019675"/>
+            <a:ext cx="400050" cy="400050"/>
+          </a:xfrm>
+          <a:prstGeom xmlns:a="http://schemas.openxmlformats.org/drawingml/2006/main" prst="rect">
+            <a:avLst/>
+          </a:prstGeom>
+          <a:noFill xmlns:a="http://schemas.openxmlformats.org/drawingml/2006/main"/>
+          <a:ln xmlns:a="http://schemas.openxmlformats.org/drawingml/2006/main" w="0">
+            <a:noFill/>
+          </a:ln>
+        </p:spPr>
+        <p:txBody>
+          <a:bodyPr xmlns:a="http://schemas.openxmlformats.org/drawingml/2006/main" anchor="ctr">
+            <a:normAutofit fontScale="100000"/>
+          </a:bodyPr>
+          <a:lstStyle xmlns:a="http://schemas.openxmlformats.org/drawingml/2006/main"/>
+          <a:p xmlns:a="http://schemas.openxmlformats.org/drawingml/2006/main">
+            <a:pPr algn="ctr">
+              <a:defRPr sz="1125" b="1">
                 <a:solidFill>
                   <a:srgbClr val="2F785D"/>
                 </a:solidFill>
                 <a:latin typeface="Arial"/>
                 <a:ea typeface="Arial"/>
                 <a:cs typeface="Arial"/>
+              </a:defRPr>
+            </a:pPr>
+            <a:r>
+              <a:rPr sz="1125" b="1">
+                <a:solidFill>
+                  <a:srgbClr val="2F785D"/>
+                </a:solidFill>
+                <a:latin typeface="Arial"/>
+                <a:ea typeface="Arial"/>
+                <a:cs typeface="Arial"/>
               </a:rPr>
-              <a:t>Check the result: Compare the new forms and justify the conclusion.</a:t>
+              <a:t>5</a:t>
+            </a:r>
+          </a:p>
+        </p:txBody>
+      </p:sp>
+      <p:sp>
+        <p:nvSpPr>
+          <p:cNvPr id="25" name="">
+            <a:extLst xmlns:a="http://schemas.openxmlformats.org/drawingml/2006/main">
+              <a:ext uri="{FF2B5EF4-FFF2-40B4-BE49-F238E27FC236}">
+                <a16:creationId xmlns:a16="http://schemas.microsoft.com/office/drawing/2014/main" id="{0BE9BBF7-395E-47C0-ACBF-EBEE753B2B78}"/>
+              </a:ext>
+            </a:extLst>
+          </p:cNvPr>
+          <p:cNvSpPr>
+            <a:spLocks xmlns:a="http://schemas.openxmlformats.org/drawingml/2006/main" noGrp="1"/>
+          </p:cNvSpPr>
+          <p:nvPr/>
+        </p:nvSpPr>
+        <p:spPr>
+          <a:xfrm xmlns:a="http://schemas.openxmlformats.org/drawingml/2006/main">
+            <a:off x="1714500" y="4933950"/>
+            <a:ext cx="9525000" cy="638175"/>
+          </a:xfrm>
+          <a:prstGeom xmlns:a="http://schemas.openxmlformats.org/drawingml/2006/main" prst="rect">
+            <a:avLst/>
+          </a:prstGeom>
+          <a:noFill xmlns:a="http://schemas.openxmlformats.org/drawingml/2006/main"/>
+          <a:ln xmlns:a="http://schemas.openxmlformats.org/drawingml/2006/main" w="0">
+            <a:noFill/>
+          </a:ln>
+        </p:spPr>
+        <p:txBody>
+          <a:bodyPr xmlns:a="http://schemas.openxmlformats.org/drawingml/2006/main" anchor="ctr">
+            <a:normAutofit fontScale="100000"/>
+          </a:bodyPr>
+          <a:lstStyle xmlns:a="http://schemas.openxmlformats.org/drawingml/2006/main"/>
+          <a:p xmlns:a="http://schemas.openxmlformats.org/drawingml/2006/main">
+            <a:pPr algn="l">
+              <a:defRPr sz="1575" b="1">
+                <a:solidFill>
+                  <a:srgbClr val="2F785D"/>
+                </a:solidFill>
+                <a:latin typeface="Arial"/>
+                <a:ea typeface="Arial"/>
+                <a:cs typeface="Arial"/>
+              </a:defRPr>
+            </a:pPr>
+            <a:r>
+              <a:rPr sz="1575" b="1">
+                <a:solidFill>
+                  <a:srgbClr val="2F785D"/>
+                </a:solidFill>
+                <a:latin typeface="Arial"/>
+                <a:ea typeface="Arial"/>
+                <a:cs typeface="Arial"/>
+              </a:rPr>
+              <a:t>5/8 is greater</a:t>
             </a:r>
           </a:p>
         </p:txBody>
@@ -8841,7 +8995,7 @@
     </p:spTree>
     <p:extLst>
       <p:ext uri="{BB962C8B-B14F-4D97-AF65-F5344CB8AC3E}">
-        <p14:creationId xmlns:p14="http://schemas.microsoft.com/office/powerpoint/2010/main" val="191532580"/>
+        <p14:creationId xmlns:p14="http://schemas.microsoft.com/office/powerpoint/2010/main" val="1692277576"/>
       </p:ext>
     </p:extLst>
   </p:cSld>
@@ -9078,6 +9232,51 @@
                       </p:childTnLst>
                     </p:cTn>
                   </p:par>
+                  <p:par>
+                    <p:cTn id="23" fill="hold">
+                      <p:stCondLst>
+                        <p:cond delay="indefinite"/>
+                      </p:stCondLst>
+                      <p:childTnLst>
+                        <p:par>
+                          <p:cTn id="24" fill="hold">
+                            <p:stCondLst>
+                              <p:cond delay="0"/>
+                            </p:stCondLst>
+                            <p:childTnLst>
+                              <p:par>
+                                <p:cTn id="25" presetID="1" presetClass="entr" presetSubtype="0" fill="hold" grpId="0" nodeType="clickEffect">
+                                  <p:stCondLst>
+                                    <p:cond delay="0"/>
+                                  </p:stCondLst>
+                                  <p:childTnLst>
+                                    <p:set>
+                                      <p:cBhvr>
+                                        <p:cTn id="26" dur="1" fill="hold">
+                                          <p:stCondLst>
+                                            <p:cond delay="0"/>
+                                          </p:stCondLst>
+                                        </p:cTn>
+                                        <p:tgtEl>
+                                          <p:spTgt spid="25"/>
+                                        </p:tgtEl>
+                                        <p:attrNameLst>
+                                          <p:attrName>style.visibility</p:attrName>
+                                        </p:attrNameLst>
+                                      </p:cBhvr>
+                                      <p:to>
+                                        <p:strVal val="visible"/>
+                                      </p:to>
+                                    </p:set>
+                                  </p:childTnLst>
+                                </p:cTn>
+                              </p:par>
+                            </p:childTnLst>
+                          </p:cTn>
+                        </p:par>
+                      </p:childTnLst>
+                    </p:cTn>
+                  </p:par>
                 </p:childTnLst>
               </p:cTn>
               <p:prevCondLst>
@@ -9105,6 +9304,7 @@
       <p:bldP spid="16" grpId="0"/>
       <p:bldP spid="19" grpId="0"/>
       <p:bldP spid="22" grpId="0"/>
+      <p:bldP spid="25" grpId="0"/>
     </p:bldLst>
   </p:timing>
 </p:sld>
@@ -9134,7 +9334,7 @@
           <p:cNvPr id="15" name="">
             <a:extLst xmlns:a="http://schemas.openxmlformats.org/drawingml/2006/main">
               <a:ext uri="{FF2B5EF4-FFF2-40B4-BE49-F238E27FC236}">
-                <a16:creationId xmlns:a16="http://schemas.microsoft.com/office/drawing/2014/main" id="{AC45D2E5-7544-4EE8-8978-BFE7FD1D6CBD}"/>
+                <a16:creationId xmlns:a16="http://schemas.microsoft.com/office/drawing/2014/main" id="{D07D2350-3261-4F39-A6FE-65D34A4F6965}"/>
               </a:ext>
             </a:extLst>
           </p:cNvPr>
@@ -9166,7 +9366,7 @@
           <p:cNvPr id="2" name="">
             <a:extLst xmlns:a="http://schemas.openxmlformats.org/drawingml/2006/main">
               <a:ext uri="{FF2B5EF4-FFF2-40B4-BE49-F238E27FC236}">
-                <a16:creationId xmlns:a16="http://schemas.microsoft.com/office/drawing/2014/main" id="{62A25AE3-2814-471A-9338-F2A6B6848CC7}"/>
+                <a16:creationId xmlns:a16="http://schemas.microsoft.com/office/drawing/2014/main" id="{363AE2FC-BF87-4AC1-9ED9-805AB2304088}"/>
               </a:ext>
             </a:extLst>
           </p:cNvPr>
@@ -9223,7 +9423,7 @@
           <p:cNvPr id="3" name="">
             <a:extLst xmlns:a="http://schemas.openxmlformats.org/drawingml/2006/main">
               <a:ext uri="{FF2B5EF4-FFF2-40B4-BE49-F238E27FC236}">
-                <a16:creationId xmlns:a16="http://schemas.microsoft.com/office/drawing/2014/main" id="{CBFBB7E6-54E0-4DD3-B82F-0DF522EDB09E}"/>
+                <a16:creationId xmlns:a16="http://schemas.microsoft.com/office/drawing/2014/main" id="{7604005F-CEEE-4ABF-81CD-5AE5A85002B7}"/>
               </a:ext>
             </a:extLst>
           </p:cNvPr>
@@ -9255,7 +9455,7 @@
           <p:cNvPr id="4" name="">
             <a:extLst xmlns:a="http://schemas.openxmlformats.org/drawingml/2006/main">
               <a:ext uri="{FF2B5EF4-FFF2-40B4-BE49-F238E27FC236}">
-                <a16:creationId xmlns:a16="http://schemas.microsoft.com/office/drawing/2014/main" id="{528BA93E-75EF-4A8A-A39F-190E86960D92}"/>
+                <a16:creationId xmlns:a16="http://schemas.microsoft.com/office/drawing/2014/main" id="{C5EADC72-6E60-4847-9110-DA9C1228A3AB}"/>
               </a:ext>
             </a:extLst>
           </p:cNvPr>
@@ -9312,7 +9512,7 @@
           <p:cNvPr id="5" name="">
             <a:extLst xmlns:a="http://schemas.openxmlformats.org/drawingml/2006/main">
               <a:ext uri="{FF2B5EF4-FFF2-40B4-BE49-F238E27FC236}">
-                <a16:creationId xmlns:a16="http://schemas.microsoft.com/office/drawing/2014/main" id="{ECA0A704-39B3-446D-AC6F-5EB7FDBFC74F}"/>
+                <a16:creationId xmlns:a16="http://schemas.microsoft.com/office/drawing/2014/main" id="{25A3E022-F787-4389-BE81-A62A4B5C3E63}"/>
               </a:ext>
             </a:extLst>
           </p:cNvPr>
@@ -9369,7 +9569,7 @@
           <p:cNvPr id="6" name="">
             <a:extLst xmlns:a="http://schemas.openxmlformats.org/drawingml/2006/main">
               <a:ext uri="{FF2B5EF4-FFF2-40B4-BE49-F238E27FC236}">
-                <a16:creationId xmlns:a16="http://schemas.microsoft.com/office/drawing/2014/main" id="{095F722D-5040-41D6-B85B-5B2F9691AD16}"/>
+                <a16:creationId xmlns:a16="http://schemas.microsoft.com/office/drawing/2014/main" id="{85706B52-C9D6-4877-B56E-886DBA22E6BA}"/>
               </a:ext>
             </a:extLst>
           </p:cNvPr>
@@ -9426,7 +9626,7 @@
           <p:cNvPr id="7" name="">
             <a:extLst xmlns:a="http://schemas.openxmlformats.org/drawingml/2006/main">
               <a:ext uri="{FF2B5EF4-FFF2-40B4-BE49-F238E27FC236}">
-                <a16:creationId xmlns:a16="http://schemas.microsoft.com/office/drawing/2014/main" id="{3F9AFDE4-DD2F-4592-8FD9-C9B16DC7F09F}"/>
+                <a16:creationId xmlns:a16="http://schemas.microsoft.com/office/drawing/2014/main" id="{F12C66D0-CE49-49EF-B4C4-84D62BF2EDFB}"/>
               </a:ext>
             </a:extLst>
           </p:cNvPr>
@@ -9458,7 +9658,7 @@
           <p:cNvPr id="8" name="">
             <a:extLst xmlns:a="http://schemas.openxmlformats.org/drawingml/2006/main">
               <a:ext uri="{FF2B5EF4-FFF2-40B4-BE49-F238E27FC236}">
-                <a16:creationId xmlns:a16="http://schemas.microsoft.com/office/drawing/2014/main" id="{5D30AE70-E6A1-4659-A660-02C203D27A07}"/>
+                <a16:creationId xmlns:a16="http://schemas.microsoft.com/office/drawing/2014/main" id="{2F075E8B-59C3-4F34-8270-DDA81FB5405D}"/>
               </a:ext>
             </a:extLst>
           </p:cNvPr>
@@ -9515,7 +9715,7 @@
           <p:cNvPr id="9" name="">
             <a:extLst xmlns:a="http://schemas.openxmlformats.org/drawingml/2006/main">
               <a:ext uri="{FF2B5EF4-FFF2-40B4-BE49-F238E27FC236}">
-                <a16:creationId xmlns:a16="http://schemas.microsoft.com/office/drawing/2014/main" id="{FEBCCCAC-23C4-4E86-9FF1-0FA48F53B232}"/>
+                <a16:creationId xmlns:a16="http://schemas.microsoft.com/office/drawing/2014/main" id="{FD04E97B-AD15-42AB-95E5-21071A99E601}"/>
               </a:ext>
             </a:extLst>
           </p:cNvPr>
@@ -9572,7 +9772,7 @@
           <p:cNvPr id="10" name="">
             <a:extLst xmlns:a="http://schemas.openxmlformats.org/drawingml/2006/main">
               <a:ext uri="{FF2B5EF4-FFF2-40B4-BE49-F238E27FC236}">
-                <a16:creationId xmlns:a16="http://schemas.microsoft.com/office/drawing/2014/main" id="{15C9CD39-92E1-4410-8F76-EFFC60BCCE55}"/>
+                <a16:creationId xmlns:a16="http://schemas.microsoft.com/office/drawing/2014/main" id="{FD274BAC-0EFD-45BB-886A-9534116FB264}"/>
               </a:ext>
             </a:extLst>
           </p:cNvPr>
@@ -9629,7 +9829,7 @@
           <p:cNvPr id="11" name="">
             <a:extLst xmlns:a="http://schemas.openxmlformats.org/drawingml/2006/main">
               <a:ext uri="{FF2B5EF4-FFF2-40B4-BE49-F238E27FC236}">
-                <a16:creationId xmlns:a16="http://schemas.microsoft.com/office/drawing/2014/main" id="{7DA1004D-592A-4FEB-98D8-B334B9E3FD97}"/>
+                <a16:creationId xmlns:a16="http://schemas.microsoft.com/office/drawing/2014/main" id="{E586ECDE-C943-4ACD-8B47-DDA3462F922A}"/>
               </a:ext>
             </a:extLst>
           </p:cNvPr>
@@ -9686,7 +9886,7 @@
           <p:cNvPr id="12" name="">
             <a:extLst xmlns:a="http://schemas.openxmlformats.org/drawingml/2006/main">
               <a:ext uri="{FF2B5EF4-FFF2-40B4-BE49-F238E27FC236}">
-                <a16:creationId xmlns:a16="http://schemas.microsoft.com/office/drawing/2014/main" id="{CEE888B5-C8E1-4B0E-AFEE-93D61E06737A}"/>
+                <a16:creationId xmlns:a16="http://schemas.microsoft.com/office/drawing/2014/main" id="{25377AB6-9CBF-465A-BACC-84F33E07BFCF}"/>
               </a:ext>
             </a:extLst>
           </p:cNvPr>
@@ -9718,7 +9918,7 @@
           <p:cNvPr id="13" name="">
             <a:extLst xmlns:a="http://schemas.openxmlformats.org/drawingml/2006/main">
               <a:ext uri="{FF2B5EF4-FFF2-40B4-BE49-F238E27FC236}">
-                <a16:creationId xmlns:a16="http://schemas.microsoft.com/office/drawing/2014/main" id="{EB0F2566-35F6-44F6-9831-3A9538332C6D}"/>
+                <a16:creationId xmlns:a16="http://schemas.microsoft.com/office/drawing/2014/main" id="{DC48394C-2198-4804-8B1B-6F2DEEFA28DA}"/>
               </a:ext>
             </a:extLst>
           </p:cNvPr>
@@ -9775,7 +9975,7 @@
           <p:cNvPr id="14" name="">
             <a:extLst xmlns:a="http://schemas.openxmlformats.org/drawingml/2006/main">
               <a:ext uri="{FF2B5EF4-FFF2-40B4-BE49-F238E27FC236}">
-                <a16:creationId xmlns:a16="http://schemas.microsoft.com/office/drawing/2014/main" id="{7BE22320-4F49-438B-83A2-192388927BD7}"/>
+                <a16:creationId xmlns:a16="http://schemas.microsoft.com/office/drawing/2014/main" id="{711FBE13-405B-42AE-9D1A-A8726325D77D}"/>
               </a:ext>
             </a:extLst>
           </p:cNvPr>
@@ -9830,7 +10030,7 @@
     </p:spTree>
     <p:extLst>
       <p:ext uri="{BB962C8B-B14F-4D97-AF65-F5344CB8AC3E}">
-        <p14:creationId xmlns:p14="http://schemas.microsoft.com/office/powerpoint/2010/main" val="154372165"/>
+        <p14:creationId xmlns:p14="http://schemas.microsoft.com/office/powerpoint/2010/main" val="1937609585"/>
       </p:ext>
     </p:extLst>
   </p:cSld>
@@ -10031,7 +10231,7 @@
           <p:cNvPr id="16" name="">
             <a:extLst xmlns:a="http://schemas.openxmlformats.org/drawingml/2006/main">
               <a:ext uri="{FF2B5EF4-FFF2-40B4-BE49-F238E27FC236}">
-                <a16:creationId xmlns:a16="http://schemas.microsoft.com/office/drawing/2014/main" id="{409D1DE0-4B16-42CD-BBF6-5A1AF06E8A34}"/>
+                <a16:creationId xmlns:a16="http://schemas.microsoft.com/office/drawing/2014/main" id="{E5F45468-5056-48ED-8309-A7D8398C4B49}"/>
               </a:ext>
             </a:extLst>
           </p:cNvPr>
@@ -10063,7 +10263,7 @@
           <p:cNvPr id="2" name="">
             <a:extLst xmlns:a="http://schemas.openxmlformats.org/drawingml/2006/main">
               <a:ext uri="{FF2B5EF4-FFF2-40B4-BE49-F238E27FC236}">
-                <a16:creationId xmlns:a16="http://schemas.microsoft.com/office/drawing/2014/main" id="{9E099262-1015-4222-85B0-6130775934A1}"/>
+                <a16:creationId xmlns:a16="http://schemas.microsoft.com/office/drawing/2014/main" id="{2BA31078-2512-4B2D-89B8-01300FF8AD29}"/>
               </a:ext>
             </a:extLst>
           </p:cNvPr>
@@ -10120,7 +10320,7 @@
           <p:cNvPr id="3" name="">
             <a:extLst xmlns:a="http://schemas.openxmlformats.org/drawingml/2006/main">
               <a:ext uri="{FF2B5EF4-FFF2-40B4-BE49-F238E27FC236}">
-                <a16:creationId xmlns:a16="http://schemas.microsoft.com/office/drawing/2014/main" id="{944DF751-319B-4088-B9A1-58E0C38F6B8B}"/>
+                <a16:creationId xmlns:a16="http://schemas.microsoft.com/office/drawing/2014/main" id="{46852D6B-D3C9-406F-ADBB-1CF6A491D999}"/>
               </a:ext>
             </a:extLst>
           </p:cNvPr>
@@ -10152,7 +10352,7 @@
           <p:cNvPr id="4" name="">
             <a:extLst xmlns:a="http://schemas.openxmlformats.org/drawingml/2006/main">
               <a:ext uri="{FF2B5EF4-FFF2-40B4-BE49-F238E27FC236}">
-                <a16:creationId xmlns:a16="http://schemas.microsoft.com/office/drawing/2014/main" id="{8302E06E-CDA4-4CA6-B991-58A438AC1E82}"/>
+                <a16:creationId xmlns:a16="http://schemas.microsoft.com/office/drawing/2014/main" id="{893794B5-17F4-4323-AB7E-AB4C1287D58D}"/>
               </a:ext>
             </a:extLst>
           </p:cNvPr>
@@ -10209,7 +10409,7 @@
           <p:cNvPr id="5" name="">
             <a:extLst xmlns:a="http://schemas.openxmlformats.org/drawingml/2006/main">
               <a:ext uri="{FF2B5EF4-FFF2-40B4-BE49-F238E27FC236}">
-                <a16:creationId xmlns:a16="http://schemas.microsoft.com/office/drawing/2014/main" id="{A943EF17-3751-4F1A-B614-9998F56F9511}"/>
+                <a16:creationId xmlns:a16="http://schemas.microsoft.com/office/drawing/2014/main" id="{BB0955CF-F03C-4CA1-B9A7-54A42FE60241}"/>
               </a:ext>
             </a:extLst>
           </p:cNvPr>
@@ -10266,7 +10466,7 @@
           <p:cNvPr id="6" name="">
             <a:extLst xmlns:a="http://schemas.openxmlformats.org/drawingml/2006/main">
               <a:ext uri="{FF2B5EF4-FFF2-40B4-BE49-F238E27FC236}">
-                <a16:creationId xmlns:a16="http://schemas.microsoft.com/office/drawing/2014/main" id="{3E92E8A1-A1AC-49BD-8783-4809DD9825D6}"/>
+                <a16:creationId xmlns:a16="http://schemas.microsoft.com/office/drawing/2014/main" id="{D9423267-1B44-440C-AA22-9CCF4BD09677}"/>
               </a:ext>
             </a:extLst>
           </p:cNvPr>
@@ -10323,7 +10523,7 @@
           <p:cNvPr id="7" name="">
             <a:extLst xmlns:a="http://schemas.openxmlformats.org/drawingml/2006/main">
               <a:ext uri="{FF2B5EF4-FFF2-40B4-BE49-F238E27FC236}">
-                <a16:creationId xmlns:a16="http://schemas.microsoft.com/office/drawing/2014/main" id="{EED0391C-2BC4-48B7-8FEC-692ED1312900}"/>
+                <a16:creationId xmlns:a16="http://schemas.microsoft.com/office/drawing/2014/main" id="{E3A784E5-D564-4173-8FC3-EAC15C215053}"/>
               </a:ext>
             </a:extLst>
           </p:cNvPr>
@@ -10355,7 +10555,7 @@
           <p:cNvPr id="8" name="">
             <a:extLst xmlns:a="http://schemas.openxmlformats.org/drawingml/2006/main">
               <a:ext uri="{FF2B5EF4-FFF2-40B4-BE49-F238E27FC236}">
-                <a16:creationId xmlns:a16="http://schemas.microsoft.com/office/drawing/2014/main" id="{71FAF2BE-0AFB-4F13-BBCD-60DEF1BA30B2}"/>
+                <a16:creationId xmlns:a16="http://schemas.microsoft.com/office/drawing/2014/main" id="{040CB80B-9247-46DF-9ED6-1D9FF50BA057}"/>
               </a:ext>
             </a:extLst>
           </p:cNvPr>
@@ -10412,7 +10612,7 @@
           <p:cNvPr id="9" name="">
             <a:extLst xmlns:a="http://schemas.openxmlformats.org/drawingml/2006/main">
               <a:ext uri="{FF2B5EF4-FFF2-40B4-BE49-F238E27FC236}">
-                <a16:creationId xmlns:a16="http://schemas.microsoft.com/office/drawing/2014/main" id="{06D38951-A690-44F6-AFBF-74F41D4104FE}"/>
+                <a16:creationId xmlns:a16="http://schemas.microsoft.com/office/drawing/2014/main" id="{2B14B563-A398-4C55-B069-D2CEA429DD30}"/>
               </a:ext>
             </a:extLst>
           </p:cNvPr>
@@ -10469,7 +10669,7 @@
           <p:cNvPr id="10" name="">
             <a:extLst xmlns:a="http://schemas.openxmlformats.org/drawingml/2006/main">
               <a:ext uri="{FF2B5EF4-FFF2-40B4-BE49-F238E27FC236}">
-                <a16:creationId xmlns:a16="http://schemas.microsoft.com/office/drawing/2014/main" id="{E03D881B-0FEE-425B-961A-E870F8E65025}"/>
+                <a16:creationId xmlns:a16="http://schemas.microsoft.com/office/drawing/2014/main" id="{55EA6740-75EF-4FB6-B74A-8D421B2DAFB5}"/>
               </a:ext>
             </a:extLst>
           </p:cNvPr>
@@ -10526,7 +10726,7 @@
           <p:cNvPr id="11" name="">
             <a:extLst xmlns:a="http://schemas.openxmlformats.org/drawingml/2006/main">
               <a:ext uri="{FF2B5EF4-FFF2-40B4-BE49-F238E27FC236}">
-                <a16:creationId xmlns:a16="http://schemas.microsoft.com/office/drawing/2014/main" id="{80145590-28FC-4452-B33C-94EE5B5F6090}"/>
+                <a16:creationId xmlns:a16="http://schemas.microsoft.com/office/drawing/2014/main" id="{C8DC33C0-BBFA-4B6B-95C5-DDE63F4411C1}"/>
               </a:ext>
             </a:extLst>
           </p:cNvPr>
@@ -10583,7 +10783,7 @@
           <p:cNvPr id="12" name="">
             <a:extLst xmlns:a="http://schemas.openxmlformats.org/drawingml/2006/main">
               <a:ext uri="{FF2B5EF4-FFF2-40B4-BE49-F238E27FC236}">
-                <a16:creationId xmlns:a16="http://schemas.microsoft.com/office/drawing/2014/main" id="{ED3A3082-518D-47A6-8550-B05E55FAB5B5}"/>
+                <a16:creationId xmlns:a16="http://schemas.microsoft.com/office/drawing/2014/main" id="{5C2AAD91-0241-4661-82CD-40943459A67E}"/>
               </a:ext>
             </a:extLst>
           </p:cNvPr>
@@ -10640,7 +10840,7 @@
           <p:cNvPr id="13" name="">
             <a:extLst xmlns:a="http://schemas.openxmlformats.org/drawingml/2006/main">
               <a:ext uri="{FF2B5EF4-FFF2-40B4-BE49-F238E27FC236}">
-                <a16:creationId xmlns:a16="http://schemas.microsoft.com/office/drawing/2014/main" id="{8D60EB54-05AA-4F8C-B922-922D7B62EF44}"/>
+                <a16:creationId xmlns:a16="http://schemas.microsoft.com/office/drawing/2014/main" id="{530EC2EB-710D-4B79-8E2A-4DF40D6FA27D}"/>
               </a:ext>
             </a:extLst>
           </p:cNvPr>
@@ -10697,7 +10897,7 @@
           <p:cNvPr id="14" name="">
             <a:extLst xmlns:a="http://schemas.openxmlformats.org/drawingml/2006/main">
               <a:ext uri="{FF2B5EF4-FFF2-40B4-BE49-F238E27FC236}">
-                <a16:creationId xmlns:a16="http://schemas.microsoft.com/office/drawing/2014/main" id="{52360A98-46F8-4176-9D98-42EAFCFDF2B1}"/>
+                <a16:creationId xmlns:a16="http://schemas.microsoft.com/office/drawing/2014/main" id="{90016E4F-A576-42CE-A797-D10DCFA38B1B}"/>
               </a:ext>
             </a:extLst>
           </p:cNvPr>
@@ -10754,7 +10954,7 @@
           <p:cNvPr id="15" name="">
             <a:extLst xmlns:a="http://schemas.openxmlformats.org/drawingml/2006/main">
               <a:ext uri="{FF2B5EF4-FFF2-40B4-BE49-F238E27FC236}">
-                <a16:creationId xmlns:a16="http://schemas.microsoft.com/office/drawing/2014/main" id="{1EA232C2-8167-40AE-85D3-51CCC4183D70}"/>
+                <a16:creationId xmlns:a16="http://schemas.microsoft.com/office/drawing/2014/main" id="{6DD6744F-B730-43A1-A09D-65BC94FFAFC5}"/>
               </a:ext>
             </a:extLst>
           </p:cNvPr>
@@ -10809,7 +11009,7 @@
     </p:spTree>
     <p:extLst>
       <p:ext uri="{BB962C8B-B14F-4D97-AF65-F5344CB8AC3E}">
-        <p14:creationId xmlns:p14="http://schemas.microsoft.com/office/powerpoint/2010/main" val="1967802861"/>
+        <p14:creationId xmlns:p14="http://schemas.microsoft.com/office/powerpoint/2010/main" val="1289705654"/>
       </p:ext>
     </p:extLst>
   </p:cSld>
@@ -10964,7 +11164,7 @@
           <p:cNvPr id="16" name="">
             <a:extLst xmlns:a="http://schemas.openxmlformats.org/drawingml/2006/main">
               <a:ext uri="{FF2B5EF4-FFF2-40B4-BE49-F238E27FC236}">
-                <a16:creationId xmlns:a16="http://schemas.microsoft.com/office/drawing/2014/main" id="{C17256A6-17A0-466B-8DCE-A963BAB6AF72}"/>
+                <a16:creationId xmlns:a16="http://schemas.microsoft.com/office/drawing/2014/main" id="{92FD35C9-E821-4C38-BEB1-869FB1A73E9A}"/>
               </a:ext>
             </a:extLst>
           </p:cNvPr>
@@ -10996,7 +11196,7 @@
           <p:cNvPr id="2" name="">
             <a:extLst xmlns:a="http://schemas.openxmlformats.org/drawingml/2006/main">
               <a:ext uri="{FF2B5EF4-FFF2-40B4-BE49-F238E27FC236}">
-                <a16:creationId xmlns:a16="http://schemas.microsoft.com/office/drawing/2014/main" id="{8B18A79D-E613-4159-A675-09242C6DDC34}"/>
+                <a16:creationId xmlns:a16="http://schemas.microsoft.com/office/drawing/2014/main" id="{ED4809BE-AF00-4FF5-BF0C-BF94D8B58030}"/>
               </a:ext>
             </a:extLst>
           </p:cNvPr>
@@ -11053,7 +11253,7 @@
           <p:cNvPr id="3" name="">
             <a:extLst xmlns:a="http://schemas.openxmlformats.org/drawingml/2006/main">
               <a:ext uri="{FF2B5EF4-FFF2-40B4-BE49-F238E27FC236}">
-                <a16:creationId xmlns:a16="http://schemas.microsoft.com/office/drawing/2014/main" id="{7482E2B8-87E3-4B30-BC40-61C4480525C8}"/>
+                <a16:creationId xmlns:a16="http://schemas.microsoft.com/office/drawing/2014/main" id="{3252793E-A065-425D-8EAC-439855D1B537}"/>
               </a:ext>
             </a:extLst>
           </p:cNvPr>
@@ -11085,7 +11285,7 @@
           <p:cNvPr id="4" name="">
             <a:extLst xmlns:a="http://schemas.openxmlformats.org/drawingml/2006/main">
               <a:ext uri="{FF2B5EF4-FFF2-40B4-BE49-F238E27FC236}">
-                <a16:creationId xmlns:a16="http://schemas.microsoft.com/office/drawing/2014/main" id="{691D6F1A-600D-46DD-A6AB-184AA2A3E331}"/>
+                <a16:creationId xmlns:a16="http://schemas.microsoft.com/office/drawing/2014/main" id="{4EAD90F1-51E5-42DC-A937-DA12EA720411}"/>
               </a:ext>
             </a:extLst>
           </p:cNvPr>
@@ -11142,7 +11342,7 @@
           <p:cNvPr id="5" name="">
             <a:extLst xmlns:a="http://schemas.openxmlformats.org/drawingml/2006/main">
               <a:ext uri="{FF2B5EF4-FFF2-40B4-BE49-F238E27FC236}">
-                <a16:creationId xmlns:a16="http://schemas.microsoft.com/office/drawing/2014/main" id="{5D8E1DA2-72D9-4986-A2C9-351E58340175}"/>
+                <a16:creationId xmlns:a16="http://schemas.microsoft.com/office/drawing/2014/main" id="{1C4F33C8-F561-4335-BCCA-66AEA340FB8F}"/>
               </a:ext>
             </a:extLst>
           </p:cNvPr>
@@ -11199,7 +11399,7 @@
           <p:cNvPr id="6" name="">
             <a:extLst xmlns:a="http://schemas.openxmlformats.org/drawingml/2006/main">
               <a:ext uri="{FF2B5EF4-FFF2-40B4-BE49-F238E27FC236}">
-                <a16:creationId xmlns:a16="http://schemas.microsoft.com/office/drawing/2014/main" id="{46016DC6-CE4A-4920-8106-912304C442A5}"/>
+                <a16:creationId xmlns:a16="http://schemas.microsoft.com/office/drawing/2014/main" id="{AD02C619-54B9-44B0-A375-2E944FA2A72E}"/>
               </a:ext>
             </a:extLst>
           </p:cNvPr>
@@ -11256,7 +11456,7 @@
           <p:cNvPr id="7" name="">
             <a:extLst xmlns:a="http://schemas.openxmlformats.org/drawingml/2006/main">
               <a:ext uri="{FF2B5EF4-FFF2-40B4-BE49-F238E27FC236}">
-                <a16:creationId xmlns:a16="http://schemas.microsoft.com/office/drawing/2014/main" id="{7FFD5BDF-C615-4CC2-8465-3CD62BCF48CE}"/>
+                <a16:creationId xmlns:a16="http://schemas.microsoft.com/office/drawing/2014/main" id="{C124C2B8-65C9-4272-ABF8-89EE8C4A3A4C}"/>
               </a:ext>
             </a:extLst>
           </p:cNvPr>
@@ -11288,7 +11488,7 @@
           <p:cNvPr id="8" name="">
             <a:extLst xmlns:a="http://schemas.openxmlformats.org/drawingml/2006/main">
               <a:ext uri="{FF2B5EF4-FFF2-40B4-BE49-F238E27FC236}">
-                <a16:creationId xmlns:a16="http://schemas.microsoft.com/office/drawing/2014/main" id="{E7E09BAD-97FB-4F37-BB51-80E4DDF3741B}"/>
+                <a16:creationId xmlns:a16="http://schemas.microsoft.com/office/drawing/2014/main" id="{0EC1443C-0742-4509-92B3-7BCA839AEEF3}"/>
               </a:ext>
             </a:extLst>
           </p:cNvPr>
@@ -11345,7 +11545,7 @@
           <p:cNvPr id="9" name="">
             <a:extLst xmlns:a="http://schemas.openxmlformats.org/drawingml/2006/main">
               <a:ext uri="{FF2B5EF4-FFF2-40B4-BE49-F238E27FC236}">
-                <a16:creationId xmlns:a16="http://schemas.microsoft.com/office/drawing/2014/main" id="{0CC3EA2B-0D4B-4CF2-B081-2AFDA00679BC}"/>
+                <a16:creationId xmlns:a16="http://schemas.microsoft.com/office/drawing/2014/main" id="{D018127D-AD83-48B1-A78A-0C9636739C26}"/>
               </a:ext>
             </a:extLst>
           </p:cNvPr>
@@ -11406,7 +11606,7 @@
           <p:nvPr/>
         </p:nvPicPr>
         <p:blipFill>
-          <a:blip xmlns:r="http://schemas.openxmlformats.org/officeDocument/2006/relationships" xmlns:a="http://schemas.openxmlformats.org/drawingml/2006/main" r:embed="R41c40f55587a49fe"/>
+          <a:blip xmlns:r="http://schemas.openxmlformats.org/officeDocument/2006/relationships" xmlns:a="http://schemas.openxmlformats.org/drawingml/2006/main" r:embed="Rfbae1438b0b14bb8"/>
           <a:stretch xmlns:a="http://schemas.openxmlformats.org/drawingml/2006/main"/>
         </p:blipFill>
         <p:spPr>
@@ -11424,7 +11624,7 @@
           <p:cNvPr id="11" name="">
             <a:extLst xmlns:a="http://schemas.openxmlformats.org/drawingml/2006/main">
               <a:ext uri="{FF2B5EF4-FFF2-40B4-BE49-F238E27FC236}">
-                <a16:creationId xmlns:a16="http://schemas.microsoft.com/office/drawing/2014/main" id="{68EB016A-1026-434C-8616-0A92C349B2A0}"/>
+                <a16:creationId xmlns:a16="http://schemas.microsoft.com/office/drawing/2014/main" id="{D7A8FC4F-3096-4749-BFF1-0F11A7598F2A}"/>
               </a:ext>
             </a:extLst>
           </p:cNvPr>
@@ -11481,7 +11681,7 @@
           <p:cNvPr id="12" name="">
             <a:extLst xmlns:a="http://schemas.openxmlformats.org/drawingml/2006/main">
               <a:ext uri="{FF2B5EF4-FFF2-40B4-BE49-F238E27FC236}">
-                <a16:creationId xmlns:a16="http://schemas.microsoft.com/office/drawing/2014/main" id="{767D9293-A620-49A8-9288-70F303439B91}"/>
+                <a16:creationId xmlns:a16="http://schemas.microsoft.com/office/drawing/2014/main" id="{41AE290B-8160-41BF-955F-8D64B4EA7F39}"/>
               </a:ext>
             </a:extLst>
           </p:cNvPr>
@@ -11538,7 +11738,7 @@
           <p:cNvPr id="13" name="">
             <a:extLst xmlns:a="http://schemas.openxmlformats.org/drawingml/2006/main">
               <a:ext uri="{FF2B5EF4-FFF2-40B4-BE49-F238E27FC236}">
-                <a16:creationId xmlns:a16="http://schemas.microsoft.com/office/drawing/2014/main" id="{3BBD1286-ECA4-426C-BCDE-35E0FE4EA02F}"/>
+                <a16:creationId xmlns:a16="http://schemas.microsoft.com/office/drawing/2014/main" id="{97FCC623-2337-41A2-8D22-6F547E10A288}"/>
               </a:ext>
             </a:extLst>
           </p:cNvPr>
@@ -11570,7 +11770,7 @@
           <p:cNvPr id="14" name="">
             <a:extLst xmlns:a="http://schemas.openxmlformats.org/drawingml/2006/main">
               <a:ext uri="{FF2B5EF4-FFF2-40B4-BE49-F238E27FC236}">
-                <a16:creationId xmlns:a16="http://schemas.microsoft.com/office/drawing/2014/main" id="{6844B732-181D-4CF4-BA80-0C0D18CB4BA2}"/>
+                <a16:creationId xmlns:a16="http://schemas.microsoft.com/office/drawing/2014/main" id="{EB31B68A-6F65-4C60-A445-78BB888C67FE}"/>
               </a:ext>
             </a:extLst>
           </p:cNvPr>
@@ -11627,7 +11827,7 @@
           <p:cNvPr id="15" name="">
             <a:extLst xmlns:a="http://schemas.openxmlformats.org/drawingml/2006/main">
               <a:ext uri="{FF2B5EF4-FFF2-40B4-BE49-F238E27FC236}">
-                <a16:creationId xmlns:a16="http://schemas.microsoft.com/office/drawing/2014/main" id="{99690CBA-E125-48BD-8325-942DB5958914}"/>
+                <a16:creationId xmlns:a16="http://schemas.microsoft.com/office/drawing/2014/main" id="{4ACF9BB8-FC56-416B-AE35-528345F80511}"/>
               </a:ext>
             </a:extLst>
           </p:cNvPr>
@@ -11682,7 +11882,7 @@
     </p:spTree>
     <p:extLst>
       <p:ext uri="{BB962C8B-B14F-4D97-AF65-F5344CB8AC3E}">
-        <p14:creationId xmlns:p14="http://schemas.microsoft.com/office/powerpoint/2010/main" val="1262772845"/>
+        <p14:creationId xmlns:p14="http://schemas.microsoft.com/office/powerpoint/2010/main" val="677347887"/>
       </p:ext>
     </p:extLst>
   </p:cSld>
@@ -11837,7 +12037,7 @@
           <p:cNvPr id="23" name="">
             <a:extLst xmlns:a="http://schemas.openxmlformats.org/drawingml/2006/main">
               <a:ext uri="{FF2B5EF4-FFF2-40B4-BE49-F238E27FC236}">
-                <a16:creationId xmlns:a16="http://schemas.microsoft.com/office/drawing/2014/main" id="{5FF47534-A10F-429D-AE1D-CE788D6C52FE}"/>
+                <a16:creationId xmlns:a16="http://schemas.microsoft.com/office/drawing/2014/main" id="{A365AE45-2879-4484-90E9-B3F7D2B34E5D}"/>
               </a:ext>
             </a:extLst>
           </p:cNvPr>
@@ -11869,7 +12069,7 @@
           <p:cNvPr id="2" name="">
             <a:extLst xmlns:a="http://schemas.openxmlformats.org/drawingml/2006/main">
               <a:ext uri="{FF2B5EF4-FFF2-40B4-BE49-F238E27FC236}">
-                <a16:creationId xmlns:a16="http://schemas.microsoft.com/office/drawing/2014/main" id="{F12FEFA1-A97C-46F7-96C7-F7757E08BE9E}"/>
+                <a16:creationId xmlns:a16="http://schemas.microsoft.com/office/drawing/2014/main" id="{8A40729F-57C0-4F5F-B989-8016436E13F2}"/>
               </a:ext>
             </a:extLst>
           </p:cNvPr>
@@ -11926,7 +12126,7 @@
           <p:cNvPr id="3" name="">
             <a:extLst xmlns:a="http://schemas.openxmlformats.org/drawingml/2006/main">
               <a:ext uri="{FF2B5EF4-FFF2-40B4-BE49-F238E27FC236}">
-                <a16:creationId xmlns:a16="http://schemas.microsoft.com/office/drawing/2014/main" id="{08555D5B-0B43-4547-BC79-323B472020AE}"/>
+                <a16:creationId xmlns:a16="http://schemas.microsoft.com/office/drawing/2014/main" id="{2F1E2415-700C-4BF4-B598-A05375DCFA3A}"/>
               </a:ext>
             </a:extLst>
           </p:cNvPr>
@@ -11958,7 +12158,7 @@
           <p:cNvPr id="4" name="">
             <a:extLst xmlns:a="http://schemas.openxmlformats.org/drawingml/2006/main">
               <a:ext uri="{FF2B5EF4-FFF2-40B4-BE49-F238E27FC236}">
-                <a16:creationId xmlns:a16="http://schemas.microsoft.com/office/drawing/2014/main" id="{8F850121-3D79-4168-A468-032B4D73EA33}"/>
+                <a16:creationId xmlns:a16="http://schemas.microsoft.com/office/drawing/2014/main" id="{27D89B02-C245-4DAC-9780-441E3EB25CA3}"/>
               </a:ext>
             </a:extLst>
           </p:cNvPr>
@@ -12015,7 +12215,7 @@
           <p:cNvPr id="5" name="">
             <a:extLst xmlns:a="http://schemas.openxmlformats.org/drawingml/2006/main">
               <a:ext uri="{FF2B5EF4-FFF2-40B4-BE49-F238E27FC236}">
-                <a16:creationId xmlns:a16="http://schemas.microsoft.com/office/drawing/2014/main" id="{9EDC7A1D-6443-4DB2-9897-34C2D6C87049}"/>
+                <a16:creationId xmlns:a16="http://schemas.microsoft.com/office/drawing/2014/main" id="{2E042207-980B-482A-A195-510DDA0E1543}"/>
               </a:ext>
             </a:extLst>
           </p:cNvPr>
@@ -12072,7 +12272,7 @@
           <p:cNvPr id="6" name="">
             <a:extLst xmlns:a="http://schemas.openxmlformats.org/drawingml/2006/main">
               <a:ext uri="{FF2B5EF4-FFF2-40B4-BE49-F238E27FC236}">
-                <a16:creationId xmlns:a16="http://schemas.microsoft.com/office/drawing/2014/main" id="{AC5987B3-981A-4136-AF55-2726C1DD428D}"/>
+                <a16:creationId xmlns:a16="http://schemas.microsoft.com/office/drawing/2014/main" id="{2F10D3D1-FA28-4747-B539-EB5FCCD3C90A}"/>
               </a:ext>
             </a:extLst>
           </p:cNvPr>
@@ -12129,7 +12329,7 @@
           <p:cNvPr id="7" name="">
             <a:extLst xmlns:a="http://schemas.openxmlformats.org/drawingml/2006/main">
               <a:ext uri="{FF2B5EF4-FFF2-40B4-BE49-F238E27FC236}">
-                <a16:creationId xmlns:a16="http://schemas.microsoft.com/office/drawing/2014/main" id="{84B5FF90-D311-46D0-95EA-11D94A345E3C}"/>
+                <a16:creationId xmlns:a16="http://schemas.microsoft.com/office/drawing/2014/main" id="{E3DDAF63-D223-47EE-A4AD-FBA3B43A6B92}"/>
               </a:ext>
             </a:extLst>
           </p:cNvPr>
@@ -12161,7 +12361,7 @@
           <p:cNvPr id="8" name="">
             <a:extLst xmlns:a="http://schemas.openxmlformats.org/drawingml/2006/main">
               <a:ext uri="{FF2B5EF4-FFF2-40B4-BE49-F238E27FC236}">
-                <a16:creationId xmlns:a16="http://schemas.microsoft.com/office/drawing/2014/main" id="{B44B7BED-6D13-47AD-8FF0-466D8845E700}"/>
+                <a16:creationId xmlns:a16="http://schemas.microsoft.com/office/drawing/2014/main" id="{3FEED783-78C8-4DEA-95E7-4C6822EA91CF}"/>
               </a:ext>
             </a:extLst>
           </p:cNvPr>
@@ -12218,7 +12418,7 @@
           <p:cNvPr id="9" name="">
             <a:extLst xmlns:a="http://schemas.openxmlformats.org/drawingml/2006/main">
               <a:ext uri="{FF2B5EF4-FFF2-40B4-BE49-F238E27FC236}">
-                <a16:creationId xmlns:a16="http://schemas.microsoft.com/office/drawing/2014/main" id="{1E11C994-A318-428A-9571-97077C0E80A0}"/>
+                <a16:creationId xmlns:a16="http://schemas.microsoft.com/office/drawing/2014/main" id="{F454F994-66BF-406A-8631-39EB73D33E68}"/>
               </a:ext>
             </a:extLst>
           </p:cNvPr>
@@ -12275,7 +12475,7 @@
           <p:cNvPr id="10" name="">
             <a:extLst xmlns:a="http://schemas.openxmlformats.org/drawingml/2006/main">
               <a:ext uri="{FF2B5EF4-FFF2-40B4-BE49-F238E27FC236}">
-                <a16:creationId xmlns:a16="http://schemas.microsoft.com/office/drawing/2014/main" id="{845811AD-6FAD-408E-ACBB-2A45395322F9}"/>
+                <a16:creationId xmlns:a16="http://schemas.microsoft.com/office/drawing/2014/main" id="{FD106670-74E4-4CA6-AFDF-A75BEEC4A204}"/>
               </a:ext>
             </a:extLst>
           </p:cNvPr>
@@ -12309,7 +12509,7 @@
           <p:cNvPr id="11" name="">
             <a:extLst xmlns:a="http://schemas.openxmlformats.org/drawingml/2006/main">
               <a:ext uri="{FF2B5EF4-FFF2-40B4-BE49-F238E27FC236}">
-                <a16:creationId xmlns:a16="http://schemas.microsoft.com/office/drawing/2014/main" id="{222A12EB-A0F3-415B-91C3-635D5DFB5273}"/>
+                <a16:creationId xmlns:a16="http://schemas.microsoft.com/office/drawing/2014/main" id="{FE887830-27D0-4B32-B6B8-EA3A456BC6D1}"/>
               </a:ext>
             </a:extLst>
           </p:cNvPr>
@@ -12341,7 +12541,7 @@
           <p:cNvPr id="12" name="">
             <a:extLst xmlns:a="http://schemas.openxmlformats.org/drawingml/2006/main">
               <a:ext uri="{FF2B5EF4-FFF2-40B4-BE49-F238E27FC236}">
-                <a16:creationId xmlns:a16="http://schemas.microsoft.com/office/drawing/2014/main" id="{6C3064D9-EE1B-4D12-89AF-81E95C843CF2}"/>
+                <a16:creationId xmlns:a16="http://schemas.microsoft.com/office/drawing/2014/main" id="{EBE19D85-7B47-4921-8171-07B446C5BAFC}"/>
               </a:ext>
             </a:extLst>
           </p:cNvPr>
@@ -12398,7 +12598,7 @@
           <p:cNvPr id="13" name="">
             <a:extLst xmlns:a="http://schemas.openxmlformats.org/drawingml/2006/main">
               <a:ext uri="{FF2B5EF4-FFF2-40B4-BE49-F238E27FC236}">
-                <a16:creationId xmlns:a16="http://schemas.microsoft.com/office/drawing/2014/main" id="{58D9B2B0-5210-44DA-AB35-645761F8D87A}"/>
+                <a16:creationId xmlns:a16="http://schemas.microsoft.com/office/drawing/2014/main" id="{B4A07D05-EAD9-43B4-A703-497703456AD3}"/>
               </a:ext>
             </a:extLst>
           </p:cNvPr>
@@ -12455,7 +12655,7 @@
           <p:cNvPr id="14" name="">
             <a:extLst xmlns:a="http://schemas.openxmlformats.org/drawingml/2006/main">
               <a:ext uri="{FF2B5EF4-FFF2-40B4-BE49-F238E27FC236}">
-                <a16:creationId xmlns:a16="http://schemas.microsoft.com/office/drawing/2014/main" id="{95A41FCE-D437-4E68-A0A1-E325455A63ED}"/>
+                <a16:creationId xmlns:a16="http://schemas.microsoft.com/office/drawing/2014/main" id="{6AA98D3E-8307-4A53-9247-893F753EF454}"/>
               </a:ext>
             </a:extLst>
           </p:cNvPr>
@@ -12489,7 +12689,7 @@
           <p:cNvPr id="15" name="">
             <a:extLst xmlns:a="http://schemas.openxmlformats.org/drawingml/2006/main">
               <a:ext uri="{FF2B5EF4-FFF2-40B4-BE49-F238E27FC236}">
-                <a16:creationId xmlns:a16="http://schemas.microsoft.com/office/drawing/2014/main" id="{8D23F1FE-731C-4925-86C3-EDB51170F695}"/>
+                <a16:creationId xmlns:a16="http://schemas.microsoft.com/office/drawing/2014/main" id="{A1213A4E-06AC-40C4-A286-8A6E40318E9B}"/>
               </a:ext>
             </a:extLst>
           </p:cNvPr>
@@ -12521,7 +12721,7 @@
           <p:cNvPr id="16" name="">
             <a:extLst xmlns:a="http://schemas.openxmlformats.org/drawingml/2006/main">
               <a:ext uri="{FF2B5EF4-FFF2-40B4-BE49-F238E27FC236}">
-                <a16:creationId xmlns:a16="http://schemas.microsoft.com/office/drawing/2014/main" id="{AA182AD6-4CDD-45D1-9274-371DB7A3F6C9}"/>
+                <a16:creationId xmlns:a16="http://schemas.microsoft.com/office/drawing/2014/main" id="{4F2FB1A0-BFD9-45B9-9C92-36A8867ECF48}"/>
               </a:ext>
             </a:extLst>
           </p:cNvPr>
@@ -12578,7 +12778,7 @@
           <p:cNvPr id="17" name="">
             <a:extLst xmlns:a="http://schemas.openxmlformats.org/drawingml/2006/main">
               <a:ext uri="{FF2B5EF4-FFF2-40B4-BE49-F238E27FC236}">
-                <a16:creationId xmlns:a16="http://schemas.microsoft.com/office/drawing/2014/main" id="{E05BAD10-0835-47A9-8DA0-44492DC8EDAD}"/>
+                <a16:creationId xmlns:a16="http://schemas.microsoft.com/office/drawing/2014/main" id="{7852B964-FF2C-4C08-82EF-1ADDC71E7465}"/>
               </a:ext>
             </a:extLst>
           </p:cNvPr>
@@ -12635,7 +12835,7 @@
           <p:cNvPr id="18" name="">
             <a:extLst xmlns:a="http://schemas.openxmlformats.org/drawingml/2006/main">
               <a:ext uri="{FF2B5EF4-FFF2-40B4-BE49-F238E27FC236}">
-                <a16:creationId xmlns:a16="http://schemas.microsoft.com/office/drawing/2014/main" id="{7E81CDAF-1CB5-44FD-B4C3-9767E4D15F52}"/>
+                <a16:creationId xmlns:a16="http://schemas.microsoft.com/office/drawing/2014/main" id="{7DE9BAA7-2E27-40DC-8E93-CF7CD4791D92}"/>
               </a:ext>
             </a:extLst>
           </p:cNvPr>
@@ -12669,7 +12869,7 @@
           <p:cNvPr id="19" name="">
             <a:extLst xmlns:a="http://schemas.openxmlformats.org/drawingml/2006/main">
               <a:ext uri="{FF2B5EF4-FFF2-40B4-BE49-F238E27FC236}">
-                <a16:creationId xmlns:a16="http://schemas.microsoft.com/office/drawing/2014/main" id="{B5A56731-6ADD-4F02-9384-6236337504B1}"/>
+                <a16:creationId xmlns:a16="http://schemas.microsoft.com/office/drawing/2014/main" id="{095085CA-8D40-4415-A74C-979B1ECE02BD}"/>
               </a:ext>
             </a:extLst>
           </p:cNvPr>
@@ -12701,7 +12901,7 @@
           <p:cNvPr id="20" name="">
             <a:extLst xmlns:a="http://schemas.openxmlformats.org/drawingml/2006/main">
               <a:ext uri="{FF2B5EF4-FFF2-40B4-BE49-F238E27FC236}">
-                <a16:creationId xmlns:a16="http://schemas.microsoft.com/office/drawing/2014/main" id="{6136E08F-6378-4550-AE26-A047AE9C6978}"/>
+                <a16:creationId xmlns:a16="http://schemas.microsoft.com/office/drawing/2014/main" id="{0BC7F6EF-3CD5-4DA7-9CD3-7E52119FF76C}"/>
               </a:ext>
             </a:extLst>
           </p:cNvPr>
@@ -12758,7 +12958,7 @@
           <p:cNvPr id="21" name="">
             <a:extLst xmlns:a="http://schemas.openxmlformats.org/drawingml/2006/main">
               <a:ext uri="{FF2B5EF4-FFF2-40B4-BE49-F238E27FC236}">
-                <a16:creationId xmlns:a16="http://schemas.microsoft.com/office/drawing/2014/main" id="{32A423D2-6056-4058-A6DF-2AD70FE130CA}"/>
+                <a16:creationId xmlns:a16="http://schemas.microsoft.com/office/drawing/2014/main" id="{62BF27D7-D83B-4A30-9436-E66005BA2E5F}"/>
               </a:ext>
             </a:extLst>
           </p:cNvPr>
@@ -12815,7 +13015,7 @@
           <p:cNvPr id="22" name="">
             <a:extLst xmlns:a="http://schemas.openxmlformats.org/drawingml/2006/main">
               <a:ext uri="{FF2B5EF4-FFF2-40B4-BE49-F238E27FC236}">
-                <a16:creationId xmlns:a16="http://schemas.microsoft.com/office/drawing/2014/main" id="{7B16E7AD-3BBA-4D11-8AB2-FA552762B7F6}"/>
+                <a16:creationId xmlns:a16="http://schemas.microsoft.com/office/drawing/2014/main" id="{8D0C0270-AA3D-4F75-92A0-0A2C8FACC4F9}"/>
               </a:ext>
             </a:extLst>
           </p:cNvPr>
@@ -12870,7 +13070,7 @@
     </p:spTree>
     <p:extLst>
       <p:ext uri="{BB962C8B-B14F-4D97-AF65-F5344CB8AC3E}">
-        <p14:creationId xmlns:p14="http://schemas.microsoft.com/office/powerpoint/2010/main" val="1115606776"/>
+        <p14:creationId xmlns:p14="http://schemas.microsoft.com/office/powerpoint/2010/main" val="2002936102"/>
       </p:ext>
     </p:extLst>
   </p:cSld>
@@ -13071,7 +13271,7 @@
           <p:cNvPr id="22" name="">
             <a:extLst xmlns:a="http://schemas.openxmlformats.org/drawingml/2006/main">
               <a:ext uri="{FF2B5EF4-FFF2-40B4-BE49-F238E27FC236}">
-                <a16:creationId xmlns:a16="http://schemas.microsoft.com/office/drawing/2014/main" id="{6B829991-628E-4273-8F5C-00B6E1DE8226}"/>
+                <a16:creationId xmlns:a16="http://schemas.microsoft.com/office/drawing/2014/main" id="{62A76D7C-9970-48DD-9BDF-DBF4EE7BDC92}"/>
               </a:ext>
             </a:extLst>
           </p:cNvPr>
@@ -13103,7 +13303,7 @@
           <p:cNvPr id="2" name="">
             <a:extLst xmlns:a="http://schemas.openxmlformats.org/drawingml/2006/main">
               <a:ext uri="{FF2B5EF4-FFF2-40B4-BE49-F238E27FC236}">
-                <a16:creationId xmlns:a16="http://schemas.microsoft.com/office/drawing/2014/main" id="{EDCEF5DA-7DAF-453E-8DC7-39711E6B2C77}"/>
+                <a16:creationId xmlns:a16="http://schemas.microsoft.com/office/drawing/2014/main" id="{3E8A184C-CD31-49B4-B158-70E21A3ABBE4}"/>
               </a:ext>
             </a:extLst>
           </p:cNvPr>
@@ -13160,7 +13360,7 @@
           <p:cNvPr id="3" name="">
             <a:extLst xmlns:a="http://schemas.openxmlformats.org/drawingml/2006/main">
               <a:ext uri="{FF2B5EF4-FFF2-40B4-BE49-F238E27FC236}">
-                <a16:creationId xmlns:a16="http://schemas.microsoft.com/office/drawing/2014/main" id="{81F18CEA-EB2A-4A3D-96D7-C76F3516D03A}"/>
+                <a16:creationId xmlns:a16="http://schemas.microsoft.com/office/drawing/2014/main" id="{52239039-EEF6-4461-8284-7A6E1BD4EE3F}"/>
               </a:ext>
             </a:extLst>
           </p:cNvPr>
@@ -13192,7 +13392,7 @@
           <p:cNvPr id="4" name="">
             <a:extLst xmlns:a="http://schemas.openxmlformats.org/drawingml/2006/main">
               <a:ext uri="{FF2B5EF4-FFF2-40B4-BE49-F238E27FC236}">
-                <a16:creationId xmlns:a16="http://schemas.microsoft.com/office/drawing/2014/main" id="{150E5D05-F234-44C2-9D7B-5D34339A4885}"/>
+                <a16:creationId xmlns:a16="http://schemas.microsoft.com/office/drawing/2014/main" id="{B317F489-D941-4B75-AEC7-BF70D19EFE7C}"/>
               </a:ext>
             </a:extLst>
           </p:cNvPr>
@@ -13249,7 +13449,7 @@
           <p:cNvPr id="5" name="">
             <a:extLst xmlns:a="http://schemas.openxmlformats.org/drawingml/2006/main">
               <a:ext uri="{FF2B5EF4-FFF2-40B4-BE49-F238E27FC236}">
-                <a16:creationId xmlns:a16="http://schemas.microsoft.com/office/drawing/2014/main" id="{927CA212-F668-422D-8EE3-CE1137388261}"/>
+                <a16:creationId xmlns:a16="http://schemas.microsoft.com/office/drawing/2014/main" id="{FBC064B6-B006-45BB-A84F-D29477D3C83D}"/>
               </a:ext>
             </a:extLst>
           </p:cNvPr>
@@ -13306,7 +13506,7 @@
           <p:cNvPr id="6" name="">
             <a:extLst xmlns:a="http://schemas.openxmlformats.org/drawingml/2006/main">
               <a:ext uri="{FF2B5EF4-FFF2-40B4-BE49-F238E27FC236}">
-                <a16:creationId xmlns:a16="http://schemas.microsoft.com/office/drawing/2014/main" id="{D2191868-A6AC-47DB-964B-C3A2A87E0170}"/>
+                <a16:creationId xmlns:a16="http://schemas.microsoft.com/office/drawing/2014/main" id="{C1229B0B-2901-4C92-A814-36D45C77632A}"/>
               </a:ext>
             </a:extLst>
           </p:cNvPr>
@@ -13363,7 +13563,7 @@
           <p:cNvPr id="7" name="">
             <a:extLst xmlns:a="http://schemas.openxmlformats.org/drawingml/2006/main">
               <a:ext uri="{FF2B5EF4-FFF2-40B4-BE49-F238E27FC236}">
-                <a16:creationId xmlns:a16="http://schemas.microsoft.com/office/drawing/2014/main" id="{001E9623-AE0F-43D9-B1D2-CE04914E68D7}"/>
+                <a16:creationId xmlns:a16="http://schemas.microsoft.com/office/drawing/2014/main" id="{A66CE771-2F87-4CA2-BC82-AF72C55F047A}"/>
               </a:ext>
             </a:extLst>
           </p:cNvPr>
@@ -13395,7 +13595,7 @@
           <p:cNvPr id="8" name="">
             <a:extLst xmlns:a="http://schemas.openxmlformats.org/drawingml/2006/main">
               <a:ext uri="{FF2B5EF4-FFF2-40B4-BE49-F238E27FC236}">
-                <a16:creationId xmlns:a16="http://schemas.microsoft.com/office/drawing/2014/main" id="{36D6665E-EA17-4273-B0D3-F7220326DAA5}"/>
+                <a16:creationId xmlns:a16="http://schemas.microsoft.com/office/drawing/2014/main" id="{196FE176-A8C6-4B0D-9C12-680F562254C9}"/>
               </a:ext>
             </a:extLst>
           </p:cNvPr>
@@ -13452,7 +13652,7 @@
           <p:cNvPr id="9" name="">
             <a:extLst xmlns:a="http://schemas.openxmlformats.org/drawingml/2006/main">
               <a:ext uri="{FF2B5EF4-FFF2-40B4-BE49-F238E27FC236}">
-                <a16:creationId xmlns:a16="http://schemas.microsoft.com/office/drawing/2014/main" id="{23AE5F4A-D98E-4334-ACBF-C6DFA817C00D}"/>
+                <a16:creationId xmlns:a16="http://schemas.microsoft.com/office/drawing/2014/main" id="{3069FF37-2D26-48F5-9384-629E52B12B9D}"/>
               </a:ext>
             </a:extLst>
           </p:cNvPr>
@@ -13509,7 +13709,7 @@
           <p:cNvPr id="10" name="">
             <a:extLst xmlns:a="http://schemas.openxmlformats.org/drawingml/2006/main">
               <a:ext uri="{FF2B5EF4-FFF2-40B4-BE49-F238E27FC236}">
-                <a16:creationId xmlns:a16="http://schemas.microsoft.com/office/drawing/2014/main" id="{2CF01529-EBCF-4340-B1FC-520BADCACBBF}"/>
+                <a16:creationId xmlns:a16="http://schemas.microsoft.com/office/drawing/2014/main" id="{49BBB034-EA0C-46FD-9320-EF026DD258A7}"/>
               </a:ext>
             </a:extLst>
           </p:cNvPr>
@@ -13543,7 +13743,7 @@
           <p:cNvPr id="11" name="">
             <a:extLst xmlns:a="http://schemas.openxmlformats.org/drawingml/2006/main">
               <a:ext uri="{FF2B5EF4-FFF2-40B4-BE49-F238E27FC236}">
-                <a16:creationId xmlns:a16="http://schemas.microsoft.com/office/drawing/2014/main" id="{85C962C4-F5A2-425E-9C82-AA6807C50579}"/>
+                <a16:creationId xmlns:a16="http://schemas.microsoft.com/office/drawing/2014/main" id="{A78A74E4-EAF1-4EA8-B4F4-A8D768F0875B}"/>
               </a:ext>
             </a:extLst>
           </p:cNvPr>
@@ -13575,7 +13775,7 @@
           <p:cNvPr id="12" name="">
             <a:extLst xmlns:a="http://schemas.openxmlformats.org/drawingml/2006/main">
               <a:ext uri="{FF2B5EF4-FFF2-40B4-BE49-F238E27FC236}">
-                <a16:creationId xmlns:a16="http://schemas.microsoft.com/office/drawing/2014/main" id="{6E5D47D1-01F7-4992-BEFD-0AD0B2EA963A}"/>
+                <a16:creationId xmlns:a16="http://schemas.microsoft.com/office/drawing/2014/main" id="{3EB025BA-EC32-4F45-A512-A7CEDC79D2F2}"/>
               </a:ext>
             </a:extLst>
           </p:cNvPr>
@@ -13632,7 +13832,7 @@
           <p:cNvPr id="13" name="">
             <a:extLst xmlns:a="http://schemas.openxmlformats.org/drawingml/2006/main">
               <a:ext uri="{FF2B5EF4-FFF2-40B4-BE49-F238E27FC236}">
-                <a16:creationId xmlns:a16="http://schemas.microsoft.com/office/drawing/2014/main" id="{F23D6C62-B4A8-4521-859F-7FE4AE706DC1}"/>
+                <a16:creationId xmlns:a16="http://schemas.microsoft.com/office/drawing/2014/main" id="{B0BAD113-A669-40BB-9D07-234B7885F682}"/>
               </a:ext>
             </a:extLst>
           </p:cNvPr>
@@ -13689,7 +13889,7 @@
           <p:cNvPr id="14" name="">
             <a:extLst xmlns:a="http://schemas.openxmlformats.org/drawingml/2006/main">
               <a:ext uri="{FF2B5EF4-FFF2-40B4-BE49-F238E27FC236}">
-                <a16:creationId xmlns:a16="http://schemas.microsoft.com/office/drawing/2014/main" id="{C995C1B5-7C1F-4984-B930-888F5533582F}"/>
+                <a16:creationId xmlns:a16="http://schemas.microsoft.com/office/drawing/2014/main" id="{72470903-9A52-4456-B90C-0EDDE8F35C65}"/>
               </a:ext>
             </a:extLst>
           </p:cNvPr>
@@ -13723,7 +13923,7 @@
           <p:cNvPr id="15" name="">
             <a:extLst xmlns:a="http://schemas.openxmlformats.org/drawingml/2006/main">
               <a:ext uri="{FF2B5EF4-FFF2-40B4-BE49-F238E27FC236}">
-                <a16:creationId xmlns:a16="http://schemas.microsoft.com/office/drawing/2014/main" id="{252483EE-3249-4DBA-AE48-048A5DA0BAD3}"/>
+                <a16:creationId xmlns:a16="http://schemas.microsoft.com/office/drawing/2014/main" id="{380AC19A-B435-412D-B50A-E596977AF729}"/>
               </a:ext>
             </a:extLst>
           </p:cNvPr>
@@ -13755,7 +13955,7 @@
           <p:cNvPr id="16" name="">
             <a:extLst xmlns:a="http://schemas.openxmlformats.org/drawingml/2006/main">
               <a:ext uri="{FF2B5EF4-FFF2-40B4-BE49-F238E27FC236}">
-                <a16:creationId xmlns:a16="http://schemas.microsoft.com/office/drawing/2014/main" id="{2A6714FA-6A33-48FB-AB0D-F694FED0155B}"/>
+                <a16:creationId xmlns:a16="http://schemas.microsoft.com/office/drawing/2014/main" id="{0CA20AB3-8FBA-4DAF-B2BF-5299C93672DA}"/>
               </a:ext>
             </a:extLst>
           </p:cNvPr>
@@ -13812,7 +14012,7 @@
           <p:cNvPr id="17" name="">
             <a:extLst xmlns:a="http://schemas.openxmlformats.org/drawingml/2006/main">
               <a:ext uri="{FF2B5EF4-FFF2-40B4-BE49-F238E27FC236}">
-                <a16:creationId xmlns:a16="http://schemas.microsoft.com/office/drawing/2014/main" id="{22C78875-E39B-4EF5-9526-AED50E1EF2E9}"/>
+                <a16:creationId xmlns:a16="http://schemas.microsoft.com/office/drawing/2014/main" id="{6CBBE83E-ACEA-4050-B554-D201F3D84ECA}"/>
               </a:ext>
             </a:extLst>
           </p:cNvPr>
@@ -13869,7 +14069,7 @@
           <p:cNvPr id="18" name="">
             <a:extLst xmlns:a="http://schemas.openxmlformats.org/drawingml/2006/main">
               <a:ext uri="{FF2B5EF4-FFF2-40B4-BE49-F238E27FC236}">
-                <a16:creationId xmlns:a16="http://schemas.microsoft.com/office/drawing/2014/main" id="{2A8AB2EC-8E7D-4E4A-B78A-6A178F3425EB}"/>
+                <a16:creationId xmlns:a16="http://schemas.microsoft.com/office/drawing/2014/main" id="{AF9D2AE9-C863-43F4-AC02-784A35680AAE}"/>
               </a:ext>
             </a:extLst>
           </p:cNvPr>
@@ -13903,7 +14103,7 @@
           <p:cNvPr id="19" name="">
             <a:extLst xmlns:a="http://schemas.openxmlformats.org/drawingml/2006/main">
               <a:ext uri="{FF2B5EF4-FFF2-40B4-BE49-F238E27FC236}">
-                <a16:creationId xmlns:a16="http://schemas.microsoft.com/office/drawing/2014/main" id="{7D6E51A0-5954-4288-97E2-201088865F03}"/>
+                <a16:creationId xmlns:a16="http://schemas.microsoft.com/office/drawing/2014/main" id="{CFF69CDD-40F6-4318-A92C-B6070F513870}"/>
               </a:ext>
             </a:extLst>
           </p:cNvPr>
@@ -13935,7 +14135,7 @@
           <p:cNvPr id="20" name="">
             <a:extLst xmlns:a="http://schemas.openxmlformats.org/drawingml/2006/main">
               <a:ext uri="{FF2B5EF4-FFF2-40B4-BE49-F238E27FC236}">
-                <a16:creationId xmlns:a16="http://schemas.microsoft.com/office/drawing/2014/main" id="{C1A1AC23-F714-4E37-81A9-ABD7CB7DE690}"/>
+                <a16:creationId xmlns:a16="http://schemas.microsoft.com/office/drawing/2014/main" id="{07AC7815-BAB6-4D83-AF00-80362DC2F68D}"/>
               </a:ext>
             </a:extLst>
           </p:cNvPr>
@@ -13992,7 +14192,7 @@
           <p:cNvPr id="21" name="">
             <a:extLst xmlns:a="http://schemas.openxmlformats.org/drawingml/2006/main">
               <a:ext uri="{FF2B5EF4-FFF2-40B4-BE49-F238E27FC236}">
-                <a16:creationId xmlns:a16="http://schemas.microsoft.com/office/drawing/2014/main" id="{5AB4622D-DD71-45DA-B5E9-97F50E340A77}"/>
+                <a16:creationId xmlns:a16="http://schemas.microsoft.com/office/drawing/2014/main" id="{EE213392-D102-4F2B-8E68-165570235AD9}"/>
               </a:ext>
             </a:extLst>
           </p:cNvPr>
@@ -14047,7 +14247,7 @@
     </p:spTree>
     <p:extLst>
       <p:ext uri="{BB962C8B-B14F-4D97-AF65-F5344CB8AC3E}">
-        <p14:creationId xmlns:p14="http://schemas.microsoft.com/office/powerpoint/2010/main" val="1166946456"/>
+        <p14:creationId xmlns:p14="http://schemas.microsoft.com/office/powerpoint/2010/main" val="105954738"/>
       </p:ext>
     </p:extLst>
   </p:cSld>
